--- a/Topic_E/Exam_Practice/TE-L04_Speaking_Workshop_Customs_Etiquette_and_Hospitality.pptx
+++ b/Topic_E/Exam_Practice/TE-L04_Speaking_Workshop_Customs_Etiquette_and_Hospitality.pptx
@@ -615,7 +615,11 @@
           <a:lstStyle/>
           <a:p>
             <a:r>
-              <a:rPr lang="en-US" dirty="0"/>
+              <a:rPr lang="ar-SA" dirty="0">
+                <a:latin typeface="Amiri" pitchFamily="2" charset="-78"/>
+                <a:ea typeface="Amiri" pitchFamily="2" charset="-78"/>
+                <a:cs typeface="Amiri" pitchFamily="2" charset="-78"/>
+              </a:rPr>
               <a:t>ROLE PLAY C (Develop) — a school magazine interview.
 SET-UP IN THE BREAKOUT ROOM: A = examiner (reads the left column ONLY — the questions, in order), B = candidate (sees the task column; Core may use the help column), C = observer (ticks the feedback checklist). 1 minute preparation, about 3 minutes speaking, 1 minute feedback, then rotate.
 Task ! is the unexpected question: in the exam the candidate has not seen it — the examiner should read it without warning.
@@ -707,7 +711,11 @@
           <a:lstStyle/>
           <a:p>
             <a:r>
-              <a:rPr lang="en-US" dirty="0"/>
+              <a:rPr lang="ar-SA" dirty="0">
+                <a:latin typeface="Amiri" pitchFamily="2" charset="-78"/>
+                <a:ea typeface="Amiri" pitchFamily="2" charset="-78"/>
+                <a:cs typeface="Amiri" pitchFamily="2" charset="-78"/>
+              </a:rPr>
               <a:t>ROLE PLAY D (Stretch) — a training session.
 SET-UP IN THE BREAKOUT ROOM: A = examiner (reads the left column ONLY — the questions, in order), B = candidate (sees the task column; Core may use the help column), C = observer (ticks the feedback checklist). 1 minute preparation, about 3 minutes speaking, 1 minute feedback, then rotate.
 Task ! is the unexpected question: in the exam the candidate has not seen it — the examiner should read it without warning.
@@ -1243,7 +1251,11 @@
           <a:lstStyle/>
           <a:p>
             <a:r>
-              <a:rPr lang="en-US" dirty="0"/>
+              <a:rPr lang="ar-SA" dirty="0">
+                <a:latin typeface="Amiri" pitchFamily="2" charset="-78"/>
+                <a:ea typeface="Amiri" pitchFamily="2" charset="-78"/>
+                <a:cs typeface="Amiri" pitchFamily="2" charset="-78"/>
+              </a:rPr>
               <a:t>TOPIC CONVERSATION — Core. Examiner asks the questions in order and may add “لِمَاذَا؟ / هَلْ يُمْكِنُ أَنْ تَشْرَحَ أَكْثَرَ؟” to push for more. Candidate aims for one full sentence per question.
 </a:t>
             </a:r>
@@ -1332,7 +1344,11 @@
           <a:lstStyle/>
           <a:p>
             <a:r>
-              <a:rPr lang="en-US" dirty="0"/>
+              <a:rPr lang="ar-SA" dirty="0">
+                <a:latin typeface="Amiri" pitchFamily="2" charset="-78"/>
+                <a:ea typeface="Amiri" pitchFamily="2" charset="-78"/>
+                <a:cs typeface="Amiri" pitchFamily="2" charset="-78"/>
+              </a:rPr>
               <a:t>TOPIC CONVERSATION — Develop. Examiner asks the questions in order and may add “لِمَاذَا؟ / هَلْ يُمْكِنُ أَنْ تَشْرَحَ أَكْثَرَ؟” to push for more. Candidate aims for two or three sentences, with advice and a comparison.
 </a:t>
             </a:r>
@@ -1421,7 +1437,11 @@
           <a:lstStyle/>
           <a:p>
             <a:r>
-              <a:rPr lang="en-US" dirty="0"/>
+              <a:rPr lang="ar-SA" dirty="0">
+                <a:latin typeface="Amiri" pitchFamily="2" charset="-78"/>
+                <a:ea typeface="Amiri" pitchFamily="2" charset="-78"/>
+                <a:cs typeface="Amiri" pitchFamily="2" charset="-78"/>
+              </a:rPr>
               <a:t>TOPIC CONVERSATION — Stretch. Examiner asks the questions in order and may add “لِمَاذَا؟ / هَلْ يُمْكِنُ أَنْ تَشْرَحَ أَكْثَرَ؟” to push for more. Candidate aims for a developed answer: opinion, balance, concession and a conditional.
 </a:t>
             </a:r>
@@ -1510,7 +1530,11 @@
           <a:lstStyle/>
           <a:p>
             <a:r>
-              <a:rPr lang="en-US" dirty="0"/>
+              <a:rPr lang="ar-SA" dirty="0">
+                <a:latin typeface="Amiri" pitchFamily="2" charset="-78"/>
+                <a:ea typeface="Amiri" pitchFamily="2" charset="-78"/>
+                <a:cs typeface="Amiri" pitchFamily="2" charset="-78"/>
+              </a:rPr>
               <a:t>WELCOME (1 min) — while students join.
 • Greet each student by name as they arrive: السَّلَامُ عَلَيْكُمْ. Take the register (Pastoral Tracker: attendance 0/1).
 • 2-MINUTE CHECK-IN (SEND training): a private chat to any student who seemed unsettled last lesson — “Are you okay today? 👍 / 👎”.
@@ -2224,7 +2248,11 @@
           <a:lstStyle/>
           <a:p>
             <a:r>
-              <a:rPr lang="en-US" dirty="0"/>
+              <a:rPr lang="ar-SA" dirty="0">
+                <a:latin typeface="Amiri" pitchFamily="2" charset="-78"/>
+                <a:ea typeface="Amiri" pitchFamily="2" charset="-78"/>
+                <a:cs typeface="Amiri" pitchFamily="2" charset="-78"/>
+              </a:rPr>
               <a:t>TEACH (3 min). Role play = precise and complete; conversation = develop. Choral repetition of the repair phrases. To a girl: تُعِيدِي.</a:t>
             </a:r>
             <a:endParaRPr lang="en-US" dirty="0"/>
@@ -2312,7 +2340,11 @@
           <a:lstStyle/>
           <a:p>
             <a:r>
-              <a:rPr lang="en-US" dirty="0"/>
+              <a:rPr lang="ar-SA" dirty="0">
+                <a:latin typeface="Amiri" pitchFamily="2" charset="-78"/>
+                <a:ea typeface="Amiri" pitchFamily="2" charset="-78"/>
+                <a:cs typeface="Amiri" pitchFamily="2" charset="-78"/>
+              </a:rPr>
               <a:t>LANGUAGE BANK (2 min) — the imperative changes with who you address: اِخْلَعْ (m.) · اِخْلَعِي (f.) · اِخْلَعُوا (pl.). The negative uses lā + jussive: لَا تَأْكُلْ · لَا تَأْكُلِي · لَا تَأْكُلُوا. Softer advice: يَنْبَغِي أَنْ / مِنَ الأَفْضَلِ أَنْ + subjunctive.</a:t>
             </a:r>
             <a:endParaRPr lang="en-US" dirty="0"/>
@@ -2400,7 +2432,11 @@
           <a:lstStyle/>
           <a:p>
             <a:r>
-              <a:rPr lang="en-US" dirty="0"/>
+              <a:rPr lang="ar-SA" dirty="0">
+                <a:latin typeface="Amiri" pitchFamily="2" charset="-78"/>
+                <a:ea typeface="Amiri" pitchFamily="2" charset="-78"/>
+                <a:cs typeface="Amiri" pitchFamily="2" charset="-78"/>
+              </a:rPr>
               <a:t>LANGUAGE BANK (2 min) — guest phrases: تَفَضَّلْ · سُفْرَةٌ دَائِمَةٌ → دَامَتْ أَيَّامُكَ · بِالهَنَاءِ وَالشِّفَاءِ. Compare: أَكْرَمُ مِنْ (afʿal min), أَكْثَرُ رَسْمِيَّةً مِنْ (akthar + noun in acc.), بِعَكْسِ / بَيْنَمَا.</a:t>
             </a:r>
             <a:endParaRPr lang="en-US" dirty="0"/>
@@ -2576,7 +2612,11 @@
           <a:lstStyle/>
           <a:p>
             <a:r>
-              <a:rPr lang="en-US" dirty="0"/>
+              <a:rPr lang="ar-SA" dirty="0">
+                <a:latin typeface="Amiri" pitchFamily="2" charset="-78"/>
+                <a:ea typeface="Amiri" pitchFamily="2" charset="-78"/>
+                <a:cs typeface="Amiri" pitchFamily="2" charset="-78"/>
+              </a:rPr>
               <a:t>ROLE PLAY A (Core) — dinner at an Arab friend’s home.
 SET-UP IN THE BREAKOUT ROOM: A = examiner (reads the left column ONLY — the questions, in order), B = candidate (sees the task column; Core may use the help column), C = observer (ticks the feedback checklist). 1 minute preparation, about 3 minutes speaking, 1 minute feedback, then rotate.
 Task ! is the unexpected question: in the exam the candidate has not seen it — the examiner should read it without warning.
@@ -2668,7 +2708,11 @@
           <a:lstStyle/>
           <a:p>
             <a:r>
-              <a:rPr lang="en-US" dirty="0"/>
+              <a:rPr lang="ar-SA" dirty="0">
+                <a:latin typeface="Amiri" pitchFamily="2" charset="-78"/>
+                <a:ea typeface="Amiri" pitchFamily="2" charset="-78"/>
+                <a:cs typeface="Amiri" pitchFamily="2" charset="-78"/>
+              </a:rPr>
               <a:t>ROLE PLAY B (Core+) — a school exchange.
 SET-UP IN THE BREAKOUT ROOM: A = examiner (reads the left column ONLY — the questions, in order), B = candidate (sees the task column; Core may use the help column), C = observer (ticks the feedback checklist). 1 minute preparation, about 3 minutes speaking, 1 minute feedback, then rotate.
 Task ! is the unexpected question: in the exam the candidate has not seen it — the examiner should read it without warning.
@@ -3156,6 +3200,7 @@
                   <a:srgbClr val="D4AF37"/>
                 </a:solidFill>
                 <a:latin typeface="Amiri" pitchFamily="2" charset="-78"/>
+                <a:ea typeface="Amiri" pitchFamily="2" charset="-78"/>
                 <a:cs typeface="Amiri" pitchFamily="2" charset="-78"/>
               </a:rPr>
               <a:t>م</a:t>
@@ -3362,6 +3407,7 @@
                   <a:srgbClr val="D4AF37"/>
                 </a:solidFill>
                 <a:latin typeface="Amiri" pitchFamily="2" charset="-78"/>
+                <a:ea typeface="Amiri" pitchFamily="2" charset="-78"/>
                 <a:cs typeface="Amiri" pitchFamily="2" charset="-78"/>
               </a:rPr>
               <a:t>وَرْشَةُ التَّحَدُّثِ — العَادَاتُ وَآدَابُ الضِّيَافَةِ</a:t>
@@ -3413,6 +3459,7 @@
                   <a:srgbClr val="C6D2E6"/>
                 </a:solidFill>
                 <a:latin typeface="Amiri" pitchFamily="2" charset="-78"/>
+                <a:ea typeface="Amiri" pitchFamily="2" charset="-78"/>
                 <a:cs typeface="Amiri" pitchFamily="2" charset="-78"/>
               </a:rPr>
               <a:t>اِخْلَعْ</a:t>
@@ -3439,6 +3486,7 @@
                   <a:srgbClr val="C6D2E6"/>
                 </a:solidFill>
                 <a:latin typeface="Amiri" pitchFamily="2" charset="-78"/>
+                <a:ea typeface="Amiri" pitchFamily="2" charset="-78"/>
                 <a:cs typeface="Amiri" pitchFamily="2" charset="-78"/>
               </a:rPr>
               <a:t>لَا تَنْسَ</a:t>
@@ -3465,6 +3513,7 @@
                   <a:srgbClr val="C6D2E6"/>
                 </a:solidFill>
                 <a:latin typeface="Amiri" pitchFamily="2" charset="-78"/>
+                <a:ea typeface="Amiri" pitchFamily="2" charset="-78"/>
                 <a:cs typeface="Amiri" pitchFamily="2" charset="-78"/>
               </a:rPr>
               <a:t>قَدِّمِي</a:t>
@@ -3491,6 +3540,7 @@
                   <a:srgbClr val="C6D2E6"/>
                 </a:solidFill>
                 <a:latin typeface="Amiri" pitchFamily="2" charset="-78"/>
+                <a:ea typeface="Amiri" pitchFamily="2" charset="-78"/>
                 <a:cs typeface="Amiri" pitchFamily="2" charset="-78"/>
               </a:rPr>
               <a:t>يَنْبَغِي أَنْ</a:t>
@@ -3517,6 +3567,7 @@
                   <a:srgbClr val="C6D2E6"/>
                 </a:solidFill>
                 <a:latin typeface="Amiri" pitchFamily="2" charset="-78"/>
+                <a:ea typeface="Amiri" pitchFamily="2" charset="-78"/>
                 <a:cs typeface="Amiri" pitchFamily="2" charset="-78"/>
               </a:rPr>
               <a:t>مِنَ الأَفْضَلِ أَنْ</a:t>
@@ -3543,6 +3594,7 @@
                   <a:srgbClr val="C6D2E6"/>
                 </a:solidFill>
                 <a:latin typeface="Amiri" pitchFamily="2" charset="-78"/>
+                <a:ea typeface="Amiri" pitchFamily="2" charset="-78"/>
                 <a:cs typeface="Amiri" pitchFamily="2" charset="-78"/>
               </a:rPr>
               <a:t>أَكْرَمُ مِنْ</a:t>
@@ -3569,6 +3621,7 @@
                   <a:srgbClr val="C6D2E6"/>
                 </a:solidFill>
                 <a:latin typeface="Amiri" pitchFamily="2" charset="-78"/>
+                <a:ea typeface="Amiri" pitchFamily="2" charset="-78"/>
                 <a:cs typeface="Amiri" pitchFamily="2" charset="-78"/>
               </a:rPr>
               <a:t>أَكْثَرُ … مِنْ</a:t>
@@ -4001,6 +4054,7 @@
                   <a:srgbClr val="D4AF37"/>
                 </a:solidFill>
                 <a:latin typeface="Amiri" pitchFamily="2" charset="-78"/>
+                <a:ea typeface="Amiri" pitchFamily="2" charset="-78"/>
                 <a:cs typeface="Amiri" pitchFamily="2" charset="-78"/>
               </a:rPr>
               <a:t>م</a:t>
@@ -4321,6 +4375,7 @@
                   <a:srgbClr val="8A6D1E"/>
                 </a:solidFill>
                 <a:latin typeface="Amiri" pitchFamily="2" charset="-78"/>
+                <a:ea typeface="Amiri" pitchFamily="2" charset="-78"/>
                 <a:cs typeface="Amiri" pitchFamily="2" charset="-78"/>
               </a:rPr>
               <a:t>الضِّيَافَةُ فِي ثَقَافَتَيْنِ</a:t>
@@ -4601,6 +4656,7 @@
                   <a:srgbClr val="1B3B6F"/>
                 </a:solidFill>
                 <a:latin typeface="Amiri" pitchFamily="2" charset="-78"/>
+                <a:ea typeface="Amiri" pitchFamily="2" charset="-78"/>
                 <a:cs typeface="Amiri" pitchFamily="2" charset="-78"/>
               </a:rPr>
               <a:t>يُرَحِّبُونَ … ثُمَّ يُقَدِّمُونَ … مَثَلًا …</a:t>
@@ -4677,6 +4733,7 @@
                   <a:srgbClr val="1B3B6F"/>
                 </a:solidFill>
                 <a:latin typeface="Amiri" pitchFamily="2" charset="-78"/>
+                <a:ea typeface="Amiri" pitchFamily="2" charset="-78"/>
                 <a:cs typeface="Amiri" pitchFamily="2" charset="-78"/>
               </a:rPr>
               <a:t>كَيْفَ يَسْتَقْبِلُ العَرَبُ الضُّيُوفَ؟</a:t>
@@ -4780,6 +4837,7 @@
                   <a:srgbClr val="1B3B6F"/>
                 </a:solidFill>
                 <a:latin typeface="Amiri" pitchFamily="2" charset="-78"/>
+                <a:ea typeface="Amiri" pitchFamily="2" charset="-78"/>
                 <a:cs typeface="Amiri" pitchFamily="2" charset="-78"/>
               </a:rPr>
               <a:t>بَيْنَمَا فِي بَرِيطَانْيَا … بِعَكْسِ …</a:t>
@@ -4856,6 +4914,7 @@
                   <a:srgbClr val="1B3B6F"/>
                 </a:solidFill>
                 <a:latin typeface="Amiri" pitchFamily="2" charset="-78"/>
+                <a:ea typeface="Amiri" pitchFamily="2" charset="-78"/>
                 <a:cs typeface="Amiri" pitchFamily="2" charset="-78"/>
               </a:rPr>
               <a:t>وَفِي بَرِيطَانْيَا؟</a:t>
@@ -4959,6 +5018,7 @@
                   <a:srgbClr val="1B3B6F"/>
                 </a:solidFill>
                 <a:latin typeface="Amiri" pitchFamily="2" charset="-78"/>
+                <a:ea typeface="Amiri" pitchFamily="2" charset="-78"/>
                 <a:cs typeface="Amiri" pitchFamily="2" charset="-78"/>
               </a:rPr>
               <a:t>أَظُنُّ أَنَّ … أَكْثَرُ … مِنْ … لِأَنَّ …</a:t>
@@ -5035,6 +5095,7 @@
                   <a:srgbClr val="1B3B6F"/>
                 </a:solidFill>
                 <a:latin typeface="Amiri" pitchFamily="2" charset="-78"/>
+                <a:ea typeface="Amiri" pitchFamily="2" charset="-78"/>
                 <a:cs typeface="Amiri" pitchFamily="2" charset="-78"/>
               </a:rPr>
               <a:t>أَيُّهُمَا أَكْثَرُ رَسْمِيَّةً؟</a:t>
@@ -5138,6 +5199,7 @@
                   <a:srgbClr val="1B3B6F"/>
                 </a:solidFill>
                 <a:latin typeface="Amiri" pitchFamily="2" charset="-78"/>
+                <a:ea typeface="Amiri" pitchFamily="2" charset="-78"/>
                 <a:cs typeface="Amiri" pitchFamily="2" charset="-78"/>
               </a:rPr>
               <a:t>نَعَمْ، عِنْدَمَا … قَالَتْ … فَصَدَّقَتْهَا …</a:t>
@@ -5214,6 +5276,7 @@
                   <a:srgbClr val="1B3B6F"/>
                 </a:solidFill>
                 <a:latin typeface="Amiri" pitchFamily="2" charset="-78"/>
+                <a:ea typeface="Amiri" pitchFamily="2" charset="-78"/>
                 <a:cs typeface="Amiri" pitchFamily="2" charset="-78"/>
               </a:rPr>
               <a:t>هَلْ حَدَثَ مَوْقِفٌ مُحْرِجٌ بِسَبَبِ اخْتِلَافِ العَادَاتِ؟</a:t>
@@ -5317,6 +5380,7 @@
                   <a:srgbClr val="1B3B6F"/>
                 </a:solidFill>
                 <a:latin typeface="Amiri" pitchFamily="2" charset="-78"/>
+                <a:ea typeface="Amiri" pitchFamily="2" charset="-78"/>
                 <a:cs typeface="Amiri" pitchFamily="2" charset="-78"/>
               </a:rPr>
               <a:t>اِقْبَلُوا … وَلَا … وَمِنَ الأَفْضَلِ أَنْ …</a:t>
@@ -5393,6 +5457,7 @@
                   <a:srgbClr val="1B3B6F"/>
                 </a:solidFill>
                 <a:latin typeface="Amiri" pitchFamily="2" charset="-78"/>
+                <a:ea typeface="Amiri" pitchFamily="2" charset="-78"/>
                 <a:cs typeface="Amiri" pitchFamily="2" charset="-78"/>
               </a:rPr>
               <a:t>مَا نَصِيحَتُكَ لِقُرَّائِنَا إِذَا زَارُوا بَيْتًا عَرَبِيًّا؟</a:t>
@@ -5602,6 +5667,7 @@
                   <a:srgbClr val="D4AF37"/>
                 </a:solidFill>
                 <a:latin typeface="Amiri" pitchFamily="2" charset="-78"/>
+                <a:ea typeface="Amiri" pitchFamily="2" charset="-78"/>
                 <a:cs typeface="Amiri" pitchFamily="2" charset="-78"/>
               </a:rPr>
               <a:t>م</a:t>
@@ -5922,6 +5988,7 @@
                   <a:srgbClr val="8A6D1E"/>
                 </a:solidFill>
                 <a:latin typeface="Amiri" pitchFamily="2" charset="-78"/>
+                <a:ea typeface="Amiri" pitchFamily="2" charset="-78"/>
                 <a:cs typeface="Amiri" pitchFamily="2" charset="-78"/>
               </a:rPr>
               <a:t>تَدْرِيبُ مُوَظَّفِي الفُنْدُقِ</a:t>
@@ -6202,6 +6269,7 @@
                   <a:srgbClr val="1B3B6F"/>
                 </a:solidFill>
                 <a:latin typeface="Amiri" pitchFamily="2" charset="-78"/>
+                <a:ea typeface="Amiri" pitchFamily="2" charset="-78"/>
                 <a:cs typeface="Amiri" pitchFamily="2" charset="-78"/>
               </a:rPr>
               <a:t>يَنْبَغِي أَنْ … ؛ وَعَلَيْكُمْ أَنْ …</a:t>
@@ -6278,6 +6346,7 @@
                   <a:srgbClr val="1B3B6F"/>
                 </a:solidFill>
                 <a:latin typeface="Amiri" pitchFamily="2" charset="-78"/>
+                <a:ea typeface="Amiri" pitchFamily="2" charset="-78"/>
                 <a:cs typeface="Amiri" pitchFamily="2" charset="-78"/>
               </a:rPr>
               <a:t>مَا أَهَمُّ شَيْءٍ يَجِبُ أَنْ يَعْرِفَهُ مُوَظَّفُونَا؟</a:t>
@@ -6381,6 +6450,7 @@
                   <a:srgbClr val="1B3B6F"/>
                 </a:solidFill>
                 <a:latin typeface="Amiri" pitchFamily="2" charset="-78"/>
+                <a:ea typeface="Amiri" pitchFamily="2" charset="-78"/>
                 <a:cs typeface="Amiri" pitchFamily="2" charset="-78"/>
               </a:rPr>
               <a:t>لَا تَمُدُّوا … وَلَا تُقَدِّمُوا … لِأَنَّ …</a:t>
@@ -6457,6 +6527,7 @@
                   <a:srgbClr val="1B3B6F"/>
                 </a:solidFill>
                 <a:latin typeface="Amiri" pitchFamily="2" charset="-78"/>
+                <a:ea typeface="Amiri" pitchFamily="2" charset="-78"/>
                 <a:cs typeface="Amiri" pitchFamily="2" charset="-78"/>
               </a:rPr>
               <a:t>وَمَا الأَخْطَاءُ الَّتِي يَجِبُ تَجَنُّبُهَا؟</a:t>
@@ -6560,6 +6631,7 @@
                   <a:srgbClr val="1B3B6F"/>
                 </a:solidFill>
                 <a:latin typeface="Amiri" pitchFamily="2" charset="-78"/>
+                <a:ea typeface="Amiri" pitchFamily="2" charset="-78"/>
                 <a:cs typeface="Amiri" pitchFamily="2" charset="-78"/>
               </a:rPr>
               <a:t>صَحِيحٌ أَنَّ … غَيْرَ أَنَّ …</a:t>
@@ -6636,6 +6708,7 @@
                   <a:srgbClr val="1B3B6F"/>
                 </a:solidFill>
                 <a:latin typeface="Amiri" pitchFamily="2" charset="-78"/>
+                <a:ea typeface="Amiri" pitchFamily="2" charset="-78"/>
                 <a:cs typeface="Amiri" pitchFamily="2" charset="-78"/>
               </a:rPr>
               <a:t>هَلْ يَخْتَلِفُ الضُّيُوفُ الخَلِيجِيُّونَ عَنِ الأُورُوبِّيِّينَ كَثِيرًا؟</a:t>
@@ -6739,6 +6812,7 @@
                   <a:srgbClr val="1B3B6F"/>
                 </a:solidFill>
                 <a:latin typeface="Amiri" pitchFamily="2" charset="-78"/>
+                <a:ea typeface="Amiri" pitchFamily="2" charset="-78"/>
                 <a:cs typeface="Amiri" pitchFamily="2" charset="-78"/>
               </a:rPr>
               <a:t>تَعَلَّمْتُهَا مِنْ … ؛ فَكُنْتُ … وَهٰكَذَا …</a:t>
@@ -6815,6 +6889,7 @@
                   <a:srgbClr val="1B3B6F"/>
                 </a:solidFill>
                 <a:latin typeface="Amiri" pitchFamily="2" charset="-78"/>
+                <a:ea typeface="Amiri" pitchFamily="2" charset="-78"/>
                 <a:cs typeface="Amiri" pitchFamily="2" charset="-78"/>
               </a:rPr>
               <a:t>كَيْفَ تَعَلَّمْتَ هٰذِهِ الآدَابَ؟</a:t>
@@ -6918,6 +6993,7 @@
                   <a:srgbClr val="1B3B6F"/>
                 </a:solidFill>
                 <a:latin typeface="Amiri" pitchFamily="2" charset="-78"/>
+                <a:ea typeface="Amiri" pitchFamily="2" charset="-78"/>
                 <a:cs typeface="Amiri" pitchFamily="2" charset="-78"/>
               </a:rPr>
               <a:t>لَوْ أَخْطَأَ، لَنَصَحْتُهُ بِأَنْ …</a:t>
@@ -6994,6 +7070,7 @@
                   <a:srgbClr val="1B3B6F"/>
                 </a:solidFill>
                 <a:latin typeface="Amiri" pitchFamily="2" charset="-78"/>
+                <a:ea typeface="Amiri" pitchFamily="2" charset="-78"/>
                 <a:cs typeface="Amiri" pitchFamily="2" charset="-78"/>
               </a:rPr>
               <a:t>لَوْ أَخْطَأَ مُوَظَّفٌ مَعَ ضَيْفٍ، مَاذَا يَفْعَلُ؟</a:t>
@@ -7203,6 +7280,7 @@
                   <a:srgbClr val="D4AF37"/>
                 </a:solidFill>
                 <a:latin typeface="Amiri" pitchFamily="2" charset="-78"/>
+                <a:ea typeface="Amiri" pitchFamily="2" charset="-78"/>
                 <a:cs typeface="Amiri" pitchFamily="2" charset="-78"/>
               </a:rPr>
               <a:t>م</a:t>
@@ -7523,6 +7601,7 @@
                   <a:srgbClr val="8A6D1E"/>
                 </a:solidFill>
                 <a:latin typeface="Amiri" pitchFamily="2" charset="-78"/>
+                <a:ea typeface="Amiri" pitchFamily="2" charset="-78"/>
                 <a:cs typeface="Amiri" pitchFamily="2" charset="-78"/>
               </a:rPr>
               <a:t>وَرَقَةُ المُلَاحِظِ</a:t>
@@ -8993,6 +9072,7 @@
                   <a:srgbClr val="D4AF37"/>
                 </a:solidFill>
                 <a:latin typeface="Amiri" pitchFamily="2" charset="-78"/>
+                <a:ea typeface="Amiri" pitchFamily="2" charset="-78"/>
                 <a:cs typeface="Amiri" pitchFamily="2" charset="-78"/>
               </a:rPr>
               <a:t>م</a:t>
@@ -9313,6 +9393,7 @@
                   <a:srgbClr val="8A6D1E"/>
                 </a:solidFill>
                 <a:latin typeface="Amiri" pitchFamily="2" charset="-78"/>
+                <a:ea typeface="Amiri" pitchFamily="2" charset="-78"/>
                 <a:cs typeface="Amiri" pitchFamily="2" charset="-78"/>
               </a:rPr>
               <a:t>نَمُوذَجُ الإِجَابَةِ</a:t>
@@ -9555,6 +9636,7 @@
                   <a:srgbClr val="1B3B6F"/>
                 </a:solidFill>
                 <a:latin typeface="Amiri" pitchFamily="2" charset="-78"/>
+                <a:ea typeface="Amiri" pitchFamily="2" charset="-78"/>
                 <a:cs typeface="Amiri" pitchFamily="2" charset="-78"/>
               </a:rPr>
               <a:t>شُكْرًا جَزِيلًا يَا خَالَةُ، بَيْتُكُمْ جَمِيلٌ جِدًّا.</a:t>
@@ -9631,6 +9713,7 @@
                   <a:srgbClr val="1B3B6F"/>
                 </a:solidFill>
                 <a:latin typeface="Amiri" pitchFamily="2" charset="-78"/>
+                <a:ea typeface="Amiri" pitchFamily="2" charset="-78"/>
                 <a:cs typeface="Amiri" pitchFamily="2" charset="-78"/>
               </a:rPr>
               <a:t>أَهْلًا وَسَهْلًا! تَفَضَّلْ.</a:t>
@@ -9734,6 +9817,7 @@
                   <a:srgbClr val="1B3B6F"/>
                 </a:solidFill>
                 <a:latin typeface="Amiri" pitchFamily="2" charset="-78"/>
+                <a:ea typeface="Amiri" pitchFamily="2" charset="-78"/>
                 <a:cs typeface="Amiri" pitchFamily="2" charset="-78"/>
               </a:rPr>
               <a:t>هَلْ أَخْلَعُ حِذَائِي؟</a:t>
@@ -9810,6 +9894,7 @@
                   <a:srgbClr val="1B3B6F"/>
                 </a:solidFill>
                 <a:latin typeface="Amiri" pitchFamily="2" charset="-78"/>
+                <a:ea typeface="Amiri" pitchFamily="2" charset="-78"/>
                 <a:cs typeface="Amiri" pitchFamily="2" charset="-78"/>
               </a:rPr>
               <a:t>تَفَضَّلْ، اجْلِسْ هُنَا.</a:t>
@@ -9913,6 +9998,7 @@
                   <a:srgbClr val="1B3B6F"/>
                 </a:solidFill>
                 <a:latin typeface="Amiri" pitchFamily="2" charset="-78"/>
+                <a:ea typeface="Amiri" pitchFamily="2" charset="-78"/>
                 <a:cs typeface="Amiri" pitchFamily="2" charset="-78"/>
               </a:rPr>
               <a:t>الطَّعَامُ لَذِيذٌ جِدًّا! سُفْرَةٌ دَائِمَةٌ.</a:t>
@@ -9989,6 +10075,7 @@
                   <a:srgbClr val="1B3B6F"/>
                 </a:solidFill>
                 <a:latin typeface="Amiri" pitchFamily="2" charset="-78"/>
+                <a:ea typeface="Amiri" pitchFamily="2" charset="-78"/>
                 <a:cs typeface="Amiri" pitchFamily="2" charset="-78"/>
               </a:rPr>
               <a:t>نَعَمْ، مِنْ فَضْلِكَ. هٰذَا هُوَ المَنْسَفُ.</a:t>
@@ -10092,6 +10179,7 @@
                   <a:srgbClr val="1B3B6F"/>
                 </a:solidFill>
                 <a:latin typeface="Amiri" pitchFamily="2" charset="-78"/>
+                <a:ea typeface="Amiri" pitchFamily="2" charset="-78"/>
                 <a:cs typeface="Amiri" pitchFamily="2" charset="-78"/>
               </a:rPr>
               <a:t>قَلِيلًا فَقَطْ، شُكْرًا. أَنَا شَبْعَانُ.</a:t>
@@ -10168,6 +10256,7 @@
                   <a:srgbClr val="1B3B6F"/>
                 </a:solidFill>
                 <a:latin typeface="Amiri" pitchFamily="2" charset="-78"/>
+                <a:ea typeface="Amiri" pitchFamily="2" charset="-78"/>
                 <a:cs typeface="Amiri" pitchFamily="2" charset="-78"/>
               </a:rPr>
               <a:t>دَامَتْ أَيَّامُكَ. خُذْ أَكْثَرَ!</a:t>
@@ -10271,6 +10360,7 @@
                   <a:srgbClr val="1B3B6F"/>
                 </a:solidFill>
                 <a:latin typeface="Amiri" pitchFamily="2" charset="-78"/>
+                <a:ea typeface="Amiri" pitchFamily="2" charset="-78"/>
                 <a:cs typeface="Amiri" pitchFamily="2" charset="-78"/>
               </a:rPr>
               <a:t>نَعَمْ، نَأْكُلُ مَعًا فِي المَسَاءِ، لٰكِنْ عَلَى طَاوِلَةٍ.</a:t>
@@ -10347,6 +10437,7 @@
                   <a:srgbClr val="1B3B6F"/>
                 </a:solidFill>
                 <a:latin typeface="Amiri" pitchFamily="2" charset="-78"/>
+                <a:ea typeface="Amiri" pitchFamily="2" charset="-78"/>
                 <a:cs typeface="Amiri" pitchFamily="2" charset="-78"/>
               </a:rPr>
               <a:t>هَلْ تَأْكُلُونَ مَعًا فِي بَيْتِكُمْ أَيْضًا؟</a:t>
@@ -10556,6 +10647,7 @@
                   <a:srgbClr val="D4AF37"/>
                 </a:solidFill>
                 <a:latin typeface="Amiri" pitchFamily="2" charset="-78"/>
+                <a:ea typeface="Amiri" pitchFamily="2" charset="-78"/>
                 <a:cs typeface="Amiri" pitchFamily="2" charset="-78"/>
               </a:rPr>
               <a:t>م</a:t>
@@ -10876,6 +10968,7 @@
                   <a:srgbClr val="8A6D1E"/>
                 </a:solidFill>
                 <a:latin typeface="Amiri" pitchFamily="2" charset="-78"/>
+                <a:ea typeface="Amiri" pitchFamily="2" charset="-78"/>
                 <a:cs typeface="Amiri" pitchFamily="2" charset="-78"/>
               </a:rPr>
               <a:t>نَمُوذَجُ الإِجَابَةِ</a:t>
@@ -11118,6 +11211,7 @@
                   <a:srgbClr val="1B3B6F"/>
                 </a:solidFill>
                 <a:latin typeface="Amiri" pitchFamily="2" charset="-78"/>
+                <a:ea typeface="Amiri" pitchFamily="2" charset="-78"/>
                 <a:cs typeface="Amiri" pitchFamily="2" charset="-78"/>
               </a:rPr>
               <a:t>اِذْهَبْ فِي الوَقْتِ بِالضَّبْطِ، وَلَا تَتَأَخَّرْ.</a:t>
@@ -11194,6 +11288,7 @@
                   <a:srgbClr val="1B3B6F"/>
                 </a:solidFill>
                 <a:latin typeface="Amiri" pitchFamily="2" charset="-78"/>
+                <a:ea typeface="Amiri" pitchFamily="2" charset="-78"/>
                 <a:cs typeface="Amiri" pitchFamily="2" charset="-78"/>
               </a:rPr>
               <a:t>سَأَزُورُ عَائِلَةَ صَدِيقِي الإِنْجْلِيزِيِّ. بِمَاذَا تَنْصَحُنِي؟</a:t>
@@ -11297,6 +11392,7 @@
                   <a:srgbClr val="1B3B6F"/>
                 </a:solidFill>
                 <a:latin typeface="Amiri" pitchFamily="2" charset="-78"/>
+                <a:ea typeface="Amiri" pitchFamily="2" charset="-78"/>
                 <a:cs typeface="Amiri" pitchFamily="2" charset="-78"/>
               </a:rPr>
               <a:t>نَعَمْ، اِحْمِلْ عُلْبَةَ شُوكُولَاتَةٍ أَوْ وُرُودًا.</a:t>
@@ -11373,6 +11469,7 @@
                   <a:srgbClr val="1B3B6F"/>
                 </a:solidFill>
                 <a:latin typeface="Amiri" pitchFamily="2" charset="-78"/>
+                <a:ea typeface="Amiri" pitchFamily="2" charset="-78"/>
                 <a:cs typeface="Amiri" pitchFamily="2" charset="-78"/>
               </a:rPr>
               <a:t>هَلْ أَحْمِلُ هَدِيَّةً؟</a:t>
@@ -11476,6 +11573,7 @@
                   <a:srgbClr val="1B3B6F"/>
                 </a:solidFill>
                 <a:latin typeface="Amiri" pitchFamily="2" charset="-78"/>
+                <a:ea typeface="Amiri" pitchFamily="2" charset="-78"/>
                 <a:cs typeface="Amiri" pitchFamily="2" charset="-78"/>
               </a:rPr>
               <a:t>يَنْبَغِي أَنْ تَقُولَ "مِنْ فَضْلِكَ" وَ"شُكْرًا" كَثِيرًا، وَلَا تَبْدَأْ بِالأَكْلِ قَبْلَ الجَمِيعِ.</a:t>
@@ -11552,6 +11650,7 @@
                   <a:srgbClr val="1B3B6F"/>
                 </a:solidFill>
                 <a:latin typeface="Amiri" pitchFamily="2" charset="-78"/>
+                <a:ea typeface="Amiri" pitchFamily="2" charset="-78"/>
                 <a:cs typeface="Amiri" pitchFamily="2" charset="-78"/>
               </a:rPr>
               <a:t>وَعَلَى المَائِدَةِ؟</a:t>
@@ -11655,6 +11754,7 @@
                   <a:srgbClr val="1B3B6F"/>
                 </a:solidFill>
                 <a:latin typeface="Amiri" pitchFamily="2" charset="-78"/>
+                <a:ea typeface="Amiri" pitchFamily="2" charset="-78"/>
                 <a:cs typeface="Amiri" pitchFamily="2" charset="-78"/>
               </a:rPr>
               <a:t>وَهَلِ الضِّيَافَةُ فِي عُمَانَ أَكْثَرُ رَسْمِيَّةً مِنْ هُنَا؟</a:t>
@@ -11731,6 +11831,7 @@
                   <a:srgbClr val="1B3B6F"/>
                 </a:solidFill>
                 <a:latin typeface="Amiri" pitchFamily="2" charset="-78"/>
+                <a:ea typeface="Amiri" pitchFamily="2" charset="-78"/>
                 <a:cs typeface="Amiri" pitchFamily="2" charset="-78"/>
               </a:rPr>
               <a:t>فِي عُمَانَ نَأْكُلُ بِأَيْدِينَا أَحْيَانًا.</a:t>
@@ -11834,6 +11935,7 @@
                   <a:srgbClr val="1B3B6F"/>
                 </a:solidFill>
                 <a:latin typeface="Amiri" pitchFamily="2" charset="-78"/>
+                <a:ea typeface="Amiri" pitchFamily="2" charset="-78"/>
                 <a:cs typeface="Amiri" pitchFamily="2" charset="-78"/>
               </a:rPr>
               <a:t>أُحِبُّ عَادَةَ شُرْبِ الشَّايِ فِي العَصْرِ، لِأَنَّهَا تَجْمَعُ النَّاسَ لِلْحَدِيثِ.</a:t>
@@ -11913,6 +12015,7 @@
                   <a:srgbClr val="1B3B6F"/>
                 </a:solidFill>
                 <a:latin typeface="Amiri" pitchFamily="2" charset="-78"/>
+                <a:ea typeface="Amiri" pitchFamily="2" charset="-78"/>
                 <a:cs typeface="Amiri" pitchFamily="2" charset="-78"/>
               </a:rPr>
               <a:t>نَعَمْ، نُقَدِّمُ القَهْوَةَ وَالتَّمْرَ لِكُلِّ ضَيْفٍ. وَمَا العَادَةُ الَّتِي تُحِبُّهَا هُنَا؟</a:t>
@@ -12122,6 +12225,7 @@
                   <a:srgbClr val="D4AF37"/>
                 </a:solidFill>
                 <a:latin typeface="Amiri" pitchFamily="2" charset="-78"/>
+                <a:ea typeface="Amiri" pitchFamily="2" charset="-78"/>
                 <a:cs typeface="Amiri" pitchFamily="2" charset="-78"/>
               </a:rPr>
               <a:t>م</a:t>
@@ -12442,6 +12546,7 @@
                   <a:srgbClr val="8A6D1E"/>
                 </a:solidFill>
                 <a:latin typeface="Amiri" pitchFamily="2" charset="-78"/>
+                <a:ea typeface="Amiri" pitchFamily="2" charset="-78"/>
                 <a:cs typeface="Amiri" pitchFamily="2" charset="-78"/>
               </a:rPr>
               <a:t>نَمُوذَجُ الإِجَابَةِ</a:t>
@@ -12684,6 +12789,7 @@
                   <a:srgbClr val="1B3B6F"/>
                 </a:solidFill>
                 <a:latin typeface="Amiri" pitchFamily="2" charset="-78"/>
+                <a:ea typeface="Amiri" pitchFamily="2" charset="-78"/>
                 <a:cs typeface="Amiri" pitchFamily="2" charset="-78"/>
               </a:rPr>
               <a:t>يُرَحِّبُونَ بِهِمْ بِحَرَارَةٍ، ثُمَّ يُقَدِّمُونَ القَهْوَةَ وَالتَّمْرَ فَوْرًا؛ مَثَلًا، جَدِّي لَا يَسْأَلُ الضَّيْفَ "هَلْ تُرِيدُ شَيْئًا؟"، بَلْ يُحْضِرُهُ مُبَاشَرَةً.</a:t>
@@ -12760,6 +12866,7 @@
                   <a:srgbClr val="1B3B6F"/>
                 </a:solidFill>
                 <a:latin typeface="Amiri" pitchFamily="2" charset="-78"/>
+                <a:ea typeface="Amiri" pitchFamily="2" charset="-78"/>
                 <a:cs typeface="Amiri" pitchFamily="2" charset="-78"/>
               </a:rPr>
               <a:t>كَيْفَ يَسْتَقْبِلُ العَرَبُ الضُّيُوفَ؟</a:t>
@@ -12863,6 +12970,7 @@
                   <a:srgbClr val="1B3B6F"/>
                 </a:solidFill>
                 <a:latin typeface="Amiri" pitchFamily="2" charset="-78"/>
+                <a:ea typeface="Amiri" pitchFamily="2" charset="-78"/>
                 <a:cs typeface="Amiri" pitchFamily="2" charset="-78"/>
               </a:rPr>
               <a:t>بَيْنَمَا فِي بَرِيطَانْيَا يَسْأَلُ المُضِيفُ الضَّيْفَ عَمَّا يُرِيدُ، بِعَكْسِ العَرَبِ الَّذِينَ يَعْتَبِرُونَ ذٰلِكَ قِلَّةَ كَرَمٍ.</a:t>
@@ -12939,6 +13047,7 @@
                   <a:srgbClr val="1B3B6F"/>
                 </a:solidFill>
                 <a:latin typeface="Amiri" pitchFamily="2" charset="-78"/>
+                <a:ea typeface="Amiri" pitchFamily="2" charset="-78"/>
                 <a:cs typeface="Amiri" pitchFamily="2" charset="-78"/>
               </a:rPr>
               <a:t>وَفِي بَرِيطَانْيَا؟</a:t>
@@ -13042,6 +13151,7 @@
                   <a:srgbClr val="1B3B6F"/>
                 </a:solidFill>
                 <a:latin typeface="Amiri" pitchFamily="2" charset="-78"/>
+                <a:ea typeface="Amiri" pitchFamily="2" charset="-78"/>
                 <a:cs typeface="Amiri" pitchFamily="2" charset="-78"/>
               </a:rPr>
               <a:t>أَظُنُّ أَنَّ الزِّيَارَاتِ البَرِيطَانِيَّةَ أَكْثَرُ تَنْظِيمًا، لِأَنَّهَا بِمَوْعِدٍ، أَمَّا العَرَبِيَّةُ فَأَكْثَرُ عَفْوِيَّةً وَدِفْئًا.</a:t>
@@ -13118,6 +13228,7 @@
                   <a:srgbClr val="1B3B6F"/>
                 </a:solidFill>
                 <a:latin typeface="Amiri" pitchFamily="2" charset="-78"/>
+                <a:ea typeface="Amiri" pitchFamily="2" charset="-78"/>
                 <a:cs typeface="Amiri" pitchFamily="2" charset="-78"/>
               </a:rPr>
               <a:t>أَيُّهُمَا أَكْثَرُ رَسْمِيَّةً؟</a:t>
@@ -13221,6 +13332,7 @@
                   <a:srgbClr val="1B3B6F"/>
                 </a:solidFill>
                 <a:latin typeface="Amiri" pitchFamily="2" charset="-78"/>
+                <a:ea typeface="Amiri" pitchFamily="2" charset="-78"/>
                 <a:cs typeface="Amiri" pitchFamily="2" charset="-78"/>
               </a:rPr>
               <a:t>نَعَمْ، عِنْدَمَا زَارَتْنَا صَدِيقَتِي الإِنْجْلِيزِيَّةُ، قَالَتْ "لَا، شُكْرًا" مَرَّةً وَاحِدَةً، فَصَدَّقَتْهَا أُمِّي، وَظَلَّتْ جَائِعَةً طُولَ السَّهْرَةِ!</a:t>
@@ -13297,6 +13409,7 @@
                   <a:srgbClr val="1B3B6F"/>
                 </a:solidFill>
                 <a:latin typeface="Amiri" pitchFamily="2" charset="-78"/>
+                <a:ea typeface="Amiri" pitchFamily="2" charset="-78"/>
                 <a:cs typeface="Amiri" pitchFamily="2" charset="-78"/>
               </a:rPr>
               <a:t>هَلْ حَدَثَ مَوْقِفٌ مُحْرِجٌ بِسَبَبِ اخْتِلَافِ العَادَاتِ؟</a:t>
@@ -13400,6 +13513,7 @@
                   <a:srgbClr val="1B3B6F"/>
                 </a:solidFill>
                 <a:latin typeface="Amiri" pitchFamily="2" charset="-78"/>
+                <a:ea typeface="Amiri" pitchFamily="2" charset="-78"/>
                 <a:cs typeface="Amiri" pitchFamily="2" charset="-78"/>
               </a:rPr>
               <a:t>اِقْبَلُوا القَهْوَةَ دَائِمًا، وَلَا تَرْفُضُوا الطَّعَامَ مِنَ المَرَّةِ الأُولَى، وَمِنَ الأَفْضَلِ أَنْ تَمْدَحُوا الطَّبْخَ.</a:t>
@@ -13476,6 +13590,7 @@
                   <a:srgbClr val="1B3B6F"/>
                 </a:solidFill>
                 <a:latin typeface="Amiri" pitchFamily="2" charset="-78"/>
+                <a:ea typeface="Amiri" pitchFamily="2" charset="-78"/>
                 <a:cs typeface="Amiri" pitchFamily="2" charset="-78"/>
               </a:rPr>
               <a:t>مَا نَصِيحَتُكَ لِقُرَّائِنَا إِذَا زَارُوا بَيْتًا عَرَبِيًّا؟</a:t>
@@ -13685,6 +13800,7 @@
                   <a:srgbClr val="D4AF37"/>
                 </a:solidFill>
                 <a:latin typeface="Amiri" pitchFamily="2" charset="-78"/>
+                <a:ea typeface="Amiri" pitchFamily="2" charset="-78"/>
                 <a:cs typeface="Amiri" pitchFamily="2" charset="-78"/>
               </a:rPr>
               <a:t>م</a:t>
@@ -14005,6 +14121,7 @@
                   <a:srgbClr val="8A6D1E"/>
                 </a:solidFill>
                 <a:latin typeface="Amiri" pitchFamily="2" charset="-78"/>
+                <a:ea typeface="Amiri" pitchFamily="2" charset="-78"/>
                 <a:cs typeface="Amiri" pitchFamily="2" charset="-78"/>
               </a:rPr>
               <a:t>نَمُوذَجُ الإِجَابَةِ</a:t>
@@ -14247,6 +14364,7 @@
                   <a:srgbClr val="1B3B6F"/>
                 </a:solidFill>
                 <a:latin typeface="Amiri" pitchFamily="2" charset="-78"/>
+                <a:ea typeface="Amiri" pitchFamily="2" charset="-78"/>
                 <a:cs typeface="Amiri" pitchFamily="2" charset="-78"/>
               </a:rPr>
               <a:t>يَنْبَغِي أَنْ يُدْرِكُوا أَنَّ الضِّيَافَةَ عِنْدَ العَرَبِ شَرَفٌ؛ لِذٰلِكَ عَلَيْكُمْ أَنْ تُرَحِّبُوا بِالضُّيُوفِ بِحَرَارَةٍ، وَأَنْ تُقَدِّمُوا لَهُمُ القَهْوَةَ عِنْدَ وُصُولِهِمْ.</a:t>
@@ -14323,6 +14441,7 @@
                   <a:srgbClr val="1B3B6F"/>
                 </a:solidFill>
                 <a:latin typeface="Amiri" pitchFamily="2" charset="-78"/>
+                <a:ea typeface="Amiri" pitchFamily="2" charset="-78"/>
                 <a:cs typeface="Amiri" pitchFamily="2" charset="-78"/>
               </a:rPr>
               <a:t>مَا أَهَمُّ شَيْءٍ يَجِبُ أَنْ يَعْرِفَهُ مُوَظَّفُونَا؟</a:t>
@@ -14426,6 +14545,7 @@
                   <a:srgbClr val="1B3B6F"/>
                 </a:solidFill>
                 <a:latin typeface="Amiri" pitchFamily="2" charset="-78"/>
+                <a:ea typeface="Amiri" pitchFamily="2" charset="-78"/>
                 <a:cs typeface="Amiri" pitchFamily="2" charset="-78"/>
               </a:rPr>
               <a:t>لَا تَمُدُّوا اليَدَ لِمُصَافَحَةِ امْرَأَةٍ قَبْلَ أَنْ تَمُدَّ يَدَهَا، وَلَا تُقَدِّمُوا الطَّعَامَ بِاليَدِ اليُسْرَى، لِأَنَّ ذٰلِكَ يُعْتَبَرُ قِلَّةَ احْتِرَامٍ.</a:t>
@@ -14502,6 +14622,7 @@
                   <a:srgbClr val="1B3B6F"/>
                 </a:solidFill>
                 <a:latin typeface="Amiri" pitchFamily="2" charset="-78"/>
+                <a:ea typeface="Amiri" pitchFamily="2" charset="-78"/>
                 <a:cs typeface="Amiri" pitchFamily="2" charset="-78"/>
               </a:rPr>
               <a:t>وَمَا الأَخْطَاءُ الَّتِي يَجِبُ تَجَنُّبُهَا؟</a:t>
@@ -14605,6 +14726,7 @@
                   <a:srgbClr val="1B3B6F"/>
                 </a:solidFill>
                 <a:latin typeface="Amiri" pitchFamily="2" charset="-78"/>
+                <a:ea typeface="Amiri" pitchFamily="2" charset="-78"/>
                 <a:cs typeface="Amiri" pitchFamily="2" charset="-78"/>
               </a:rPr>
               <a:t>صَحِيحٌ أَنَّ بَعْضَهُمْ يُفَضِّلُ خِدْمَةً أَكْثَرَ خُصُوصِيَّةً، غَيْرَ أَنَّ التَّعْمِيمَ خَطَأٌ؛ فَكُلُّ ضَيْفٍ فَرْدٌ، وَأَفْضَلُ طَرِيقَةٍ هِيَ أَنْ نَسْأَلَهُ بِلُطْفٍ.</a:t>
@@ -14684,6 +14806,7 @@
                   <a:srgbClr val="1B3B6F"/>
                 </a:solidFill>
                 <a:latin typeface="Amiri" pitchFamily="2" charset="-78"/>
+                <a:ea typeface="Amiri" pitchFamily="2" charset="-78"/>
                 <a:cs typeface="Amiri" pitchFamily="2" charset="-78"/>
               </a:rPr>
               <a:t>هَلْ يَخْتَلِفُ الضُّيُوفُ الخَلِيجِيُّونَ عَنِ الأُورُوبِّيِّينَ كَثِيرًا؟</a:t>
@@ -14787,6 +14910,7 @@
                   <a:srgbClr val="1B3B6F"/>
                 </a:solidFill>
                 <a:latin typeface="Amiri" pitchFamily="2" charset="-78"/>
+                <a:ea typeface="Amiri" pitchFamily="2" charset="-78"/>
                 <a:cs typeface="Amiri" pitchFamily="2" charset="-78"/>
               </a:rPr>
               <a:t>تَعَلَّمْتُهَا مِنْ جَدَّتِي؛ فَكُنْتُ أُسَاعِدُهَا فِي اسْتِقْبَالِ الضُّيُوفِ فِي رَمَضَانَ، وَهٰكَذَا عَرَفْتُ أَنَّ الابْتِسَامَةَ أَهَمُّ مِنْ أَغْلَى طَعَامٍ.</a:t>
@@ -14863,6 +14987,7 @@
                   <a:srgbClr val="1B3B6F"/>
                 </a:solidFill>
                 <a:latin typeface="Amiri" pitchFamily="2" charset="-78"/>
+                <a:ea typeface="Amiri" pitchFamily="2" charset="-78"/>
                 <a:cs typeface="Amiri" pitchFamily="2" charset="-78"/>
               </a:rPr>
               <a:t>كَيْفَ تَعَلَّمْتَ هٰذِهِ الآدَابَ؟</a:t>
@@ -14966,6 +15091,7 @@
                   <a:srgbClr val="1B3B6F"/>
                 </a:solidFill>
                 <a:latin typeface="Amiri" pitchFamily="2" charset="-78"/>
+                <a:ea typeface="Amiri" pitchFamily="2" charset="-78"/>
                 <a:cs typeface="Amiri" pitchFamily="2" charset="-78"/>
               </a:rPr>
               <a:t>لَوْ أَخْطَأَ، لَنَصَحْتُهُ بِأَنْ يَعْتَذِرَ فَوْرًا بِصِدْقٍ؛ فَالاعْتِذَارُ الصَّادِقُ فِي ثَقَافَتِنَا أَقْوَى مِنْ أَيِّ خَطَأٍ.</a:t>
@@ -15042,6 +15168,7 @@
                   <a:srgbClr val="1B3B6F"/>
                 </a:solidFill>
                 <a:latin typeface="Amiri" pitchFamily="2" charset="-78"/>
+                <a:ea typeface="Amiri" pitchFamily="2" charset="-78"/>
                 <a:cs typeface="Amiri" pitchFamily="2" charset="-78"/>
               </a:rPr>
               <a:t>لَوْ أَخْطَأَ مُوَظَّفٌ مَعَ ضَيْفٍ، مَاذَا يَفْعَلُ؟</a:t>
@@ -15251,6 +15378,7 @@
                   <a:srgbClr val="D4AF37"/>
                 </a:solidFill>
                 <a:latin typeface="Amiri" pitchFamily="2" charset="-78"/>
+                <a:ea typeface="Amiri" pitchFamily="2" charset="-78"/>
                 <a:cs typeface="Amiri" pitchFamily="2" charset="-78"/>
               </a:rPr>
               <a:t>م</a:t>
@@ -15571,6 +15699,7 @@
                   <a:srgbClr val="8A6D1E"/>
                 </a:solidFill>
                 <a:latin typeface="Amiri" pitchFamily="2" charset="-78"/>
+                <a:ea typeface="Amiri" pitchFamily="2" charset="-78"/>
                 <a:cs typeface="Amiri" pitchFamily="2" charset="-78"/>
               </a:rPr>
               <a:t>الضِّيَافَةُ وَالعَادَاتُ</a:t>
@@ -15851,6 +15980,7 @@
                   <a:srgbClr val="1B3B6F"/>
                 </a:solidFill>
                 <a:latin typeface="Amiri" pitchFamily="2" charset="-78"/>
+                <a:ea typeface="Amiri" pitchFamily="2" charset="-78"/>
                 <a:cs typeface="Amiri" pitchFamily="2" charset="-78"/>
               </a:rPr>
               <a:t>نُقَدِّمُ …</a:t>
@@ -15927,6 +16057,7 @@
                   <a:srgbClr val="1B3B6F"/>
                 </a:solidFill>
                 <a:latin typeface="Amiri" pitchFamily="2" charset="-78"/>
+                <a:ea typeface="Amiri" pitchFamily="2" charset="-78"/>
                 <a:cs typeface="Amiri" pitchFamily="2" charset="-78"/>
               </a:rPr>
               <a:t>مَاذَا تُقَدِّمُ أُسْرَتُكَ لِلضُّيُوفِ؟</a:t>
@@ -16095,6 +16226,7 @@
                   <a:srgbClr val="1B3B6F"/>
                 </a:solidFill>
                 <a:latin typeface="Amiri" pitchFamily="2" charset="-78"/>
+                <a:ea typeface="Amiri" pitchFamily="2" charset="-78"/>
                 <a:cs typeface="Amiri" pitchFamily="2" charset="-78"/>
               </a:rPr>
               <a:t>نَعَمْ / لَا، …</a:t>
@@ -16171,6 +16303,7 @@
                   <a:srgbClr val="1B3B6F"/>
                 </a:solidFill>
                 <a:latin typeface="Amiri" pitchFamily="2" charset="-78"/>
+                <a:ea typeface="Amiri" pitchFamily="2" charset="-78"/>
                 <a:cs typeface="Amiri" pitchFamily="2" charset="-78"/>
               </a:rPr>
               <a:t>هَلْ تَخْلَعُونَ الأَحْذِيَةَ فِي البَيْتِ؟</a:t>
@@ -16339,6 +16472,7 @@
                   <a:srgbClr val="1B3B6F"/>
                 </a:solidFill>
                 <a:latin typeface="Amiri" pitchFamily="2" charset="-78"/>
+                <a:ea typeface="Amiri" pitchFamily="2" charset="-78"/>
                 <a:cs typeface="Amiri" pitchFamily="2" charset="-78"/>
               </a:rPr>
               <a:t>أُقَبِّلُ … / أُصَافِحُ …</a:t>
@@ -16415,6 +16549,7 @@
                   <a:srgbClr val="1B3B6F"/>
                 </a:solidFill>
                 <a:latin typeface="Amiri" pitchFamily="2" charset="-78"/>
+                <a:ea typeface="Amiri" pitchFamily="2" charset="-78"/>
                 <a:cs typeface="Amiri" pitchFamily="2" charset="-78"/>
               </a:rPr>
               <a:t>كَيْفَ تُحَيِّي جَدَّكَ؟</a:t>
@@ -16583,6 +16718,7 @@
                   <a:srgbClr val="1B3B6F"/>
                 </a:solidFill>
                 <a:latin typeface="Amiri" pitchFamily="2" charset="-78"/>
+                <a:ea typeface="Amiri" pitchFamily="2" charset="-78"/>
                 <a:cs typeface="Amiri" pitchFamily="2" charset="-78"/>
               </a:rPr>
               <a:t>اِمْدَحْ … / لَا تَتَأَخَّرْ …</a:t>
@@ -16659,6 +16795,7 @@
                   <a:srgbClr val="1B3B6F"/>
                 </a:solidFill>
                 <a:latin typeface="Amiri" pitchFamily="2" charset="-78"/>
+                <a:ea typeface="Amiri" pitchFamily="2" charset="-78"/>
                 <a:cs typeface="Amiri" pitchFamily="2" charset="-78"/>
               </a:rPr>
               <a:t>أَعْطِنِي نَصِيحَةً لِضَيْفٍ.</a:t>
@@ -16827,6 +16964,7 @@
                   <a:srgbClr val="1B3B6F"/>
                 </a:solidFill>
                 <a:latin typeface="Amiri" pitchFamily="2" charset="-78"/>
+                <a:ea typeface="Amiri" pitchFamily="2" charset="-78"/>
                 <a:cs typeface="Amiri" pitchFamily="2" charset="-78"/>
               </a:rPr>
               <a:t>نَعَمْ، أُحِبُّ … لِأَنَّ …</a:t>
@@ -16903,6 +17041,7 @@
                   <a:srgbClr val="1B3B6F"/>
                 </a:solidFill>
                 <a:latin typeface="Amiri" pitchFamily="2" charset="-78"/>
+                <a:ea typeface="Amiri" pitchFamily="2" charset="-78"/>
                 <a:cs typeface="Amiri" pitchFamily="2" charset="-78"/>
               </a:rPr>
               <a:t>هَلْ تُحِبُّ أَنْ تَسْتَقْبِلَ الضُّيُوفَ؟</a:t>
@@ -17057,6 +17196,7 @@
                   <a:srgbClr val="1B3B6F"/>
                 </a:solidFill>
                 <a:latin typeface="Amiri" pitchFamily="2" charset="-78"/>
+                <a:ea typeface="Amiri" pitchFamily="2" charset="-78"/>
                 <a:cs typeface="Amiri" pitchFamily="2" charset="-78"/>
               </a:rPr>
               <a:t>اِخْلَعْ</a:t>
@@ -17083,6 +17223,7 @@
                   <a:srgbClr val="1B3B6F"/>
                 </a:solidFill>
                 <a:latin typeface="Amiri" pitchFamily="2" charset="-78"/>
+                <a:ea typeface="Amiri" pitchFamily="2" charset="-78"/>
                 <a:cs typeface="Amiri" pitchFamily="2" charset="-78"/>
               </a:rPr>
               <a:t>اِخْلَعِي</a:t>
@@ -17109,6 +17250,7 @@
                   <a:srgbClr val="1B3B6F"/>
                 </a:solidFill>
                 <a:latin typeface="Amiri" pitchFamily="2" charset="-78"/>
+                <a:ea typeface="Amiri" pitchFamily="2" charset="-78"/>
                 <a:cs typeface="Amiri" pitchFamily="2" charset="-78"/>
               </a:rPr>
               <a:t>عَفْوًا، هَلْ يُمْكِنُ أَنْ تُعِيدَ السُّؤَالَ؟</a:t>
@@ -17242,6 +17384,7 @@
                   <a:srgbClr val="D4AF37"/>
                 </a:solidFill>
                 <a:latin typeface="Amiri" pitchFamily="2" charset="-78"/>
+                <a:ea typeface="Amiri" pitchFamily="2" charset="-78"/>
                 <a:cs typeface="Amiri" pitchFamily="2" charset="-78"/>
               </a:rPr>
               <a:t>م</a:t>
@@ -17562,6 +17705,7 @@
                   <a:srgbClr val="8A6D1E"/>
                 </a:solidFill>
                 <a:latin typeface="Amiri" pitchFamily="2" charset="-78"/>
+                <a:ea typeface="Amiri" pitchFamily="2" charset="-78"/>
                 <a:cs typeface="Amiri" pitchFamily="2" charset="-78"/>
               </a:rPr>
               <a:t>آدَابُ الضِّيَافَةِ</a:t>
@@ -17842,6 +17986,7 @@
                   <a:srgbClr val="1B3B6F"/>
                 </a:solidFill>
                 <a:latin typeface="Amiri" pitchFamily="2" charset="-78"/>
+                <a:ea typeface="Amiri" pitchFamily="2" charset="-78"/>
                 <a:cs typeface="Amiri" pitchFamily="2" charset="-78"/>
               </a:rPr>
               <a:t>عِنْدَمَا نَزُورُ … نَحْمِلُ … ثُمَّ …</a:t>
@@ -17918,6 +18063,7 @@
                   <a:srgbClr val="1B3B6F"/>
                 </a:solidFill>
                 <a:latin typeface="Amiri" pitchFamily="2" charset="-78"/>
+                <a:ea typeface="Amiri" pitchFamily="2" charset="-78"/>
                 <a:cs typeface="Amiri" pitchFamily="2" charset="-78"/>
               </a:rPr>
               <a:t>صِفْ زِيَارَةً عَائِلِيَّةً فِي ثَقَافَتِكَ.</a:t>
@@ -18021,6 +18167,7 @@
                   <a:srgbClr val="1B3B6F"/>
                 </a:solidFill>
                 <a:latin typeface="Amiri" pitchFamily="2" charset="-78"/>
+                <a:ea typeface="Amiri" pitchFamily="2" charset="-78"/>
                 <a:cs typeface="Amiri" pitchFamily="2" charset="-78"/>
               </a:rPr>
               <a:t>هُنَاكَ … أَكْثَرُ … بَيْنَمَا هُنَا …</a:t>
@@ -18097,6 +18244,7 @@
                   <a:srgbClr val="1B3B6F"/>
                 </a:solidFill>
                 <a:latin typeface="Amiri" pitchFamily="2" charset="-78"/>
+                <a:ea typeface="Amiri" pitchFamily="2" charset="-78"/>
                 <a:cs typeface="Amiri" pitchFamily="2" charset="-78"/>
               </a:rPr>
               <a:t>مَا الفَرْقُ بَيْنَ الضِّيَافَةِ هُنَا وَفِي بَلَدِ أَجْدَادِكَ؟</a:t>
@@ -18200,6 +18348,7 @@
                   <a:srgbClr val="1B3B6F"/>
                 </a:solidFill>
                 <a:latin typeface="Amiri" pitchFamily="2" charset="-78"/>
+                <a:ea typeface="Amiri" pitchFamily="2" charset="-78"/>
                 <a:cs typeface="Amiri" pitchFamily="2" charset="-78"/>
               </a:rPr>
               <a:t>أَوَّلًا … وَيَنْبَغِي أَنْ …</a:t>
@@ -18276,6 +18425,7 @@
                   <a:srgbClr val="1B3B6F"/>
                 </a:solidFill>
                 <a:latin typeface="Amiri" pitchFamily="2" charset="-78"/>
+                <a:ea typeface="Amiri" pitchFamily="2" charset="-78"/>
                 <a:cs typeface="Amiri" pitchFamily="2" charset="-78"/>
               </a:rPr>
               <a:t>مَا النَّصَائِحُ الَّتِي تُعْطِيهَا لِضَيْفٍ أَجْنَبِيٍّ؟</a:t>
@@ -18379,6 +18529,7 @@
                   <a:srgbClr val="1B3B6F"/>
                 </a:solidFill>
                 <a:latin typeface="Amiri" pitchFamily="2" charset="-78"/>
+                <a:ea typeface="Amiri" pitchFamily="2" charset="-78"/>
                 <a:cs typeface="Amiri" pitchFamily="2" charset="-78"/>
               </a:rPr>
               <a:t>كَانَتْ جَدَّتِي … أَمَّا أُمِّي فَتَطْلُبُ …</a:t>
@@ -18455,6 +18606,7 @@
                   <a:srgbClr val="1B3B6F"/>
                 </a:solidFill>
                 <a:latin typeface="Amiri" pitchFamily="2" charset="-78"/>
+                <a:ea typeface="Amiri" pitchFamily="2" charset="-78"/>
                 <a:cs typeface="Amiri" pitchFamily="2" charset="-78"/>
               </a:rPr>
               <a:t>هَلْ تَغَيَّرَتْ عَادَاتُ الضِّيَافَةِ فِي أُسْرَتِكَ؟</a:t>
@@ -18558,6 +18710,7 @@
                   <a:srgbClr val="1B3B6F"/>
                 </a:solidFill>
                 <a:latin typeface="Amiri" pitchFamily="2" charset="-78"/>
+                <a:ea typeface="Amiri" pitchFamily="2" charset="-78"/>
                 <a:cs typeface="Amiri" pitchFamily="2" charset="-78"/>
               </a:rPr>
               <a:t>سَأُرَحِّبُ … وَسَأُقَدِّمُ …</a:t>
@@ -18634,6 +18787,7 @@
                   <a:srgbClr val="1B3B6F"/>
                 </a:solidFill>
                 <a:latin typeface="Amiri" pitchFamily="2" charset="-78"/>
+                <a:ea typeface="Amiri" pitchFamily="2" charset="-78"/>
                 <a:cs typeface="Amiri" pitchFamily="2" charset="-78"/>
               </a:rPr>
               <a:t>كَيْفَ سَتَسْتَقْبِلُ ضُيُوفَكَ فِي المُسْتَقْبَلِ؟</a:t>
@@ -18843,6 +18997,7 @@
                   <a:srgbClr val="D4AF37"/>
                 </a:solidFill>
                 <a:latin typeface="Amiri" pitchFamily="2" charset="-78"/>
+                <a:ea typeface="Amiri" pitchFamily="2" charset="-78"/>
                 <a:cs typeface="Amiri" pitchFamily="2" charset="-78"/>
               </a:rPr>
               <a:t>م</a:t>
@@ -19163,6 +19318,7 @@
                   <a:srgbClr val="8A6D1E"/>
                 </a:solidFill>
                 <a:latin typeface="Amiri" pitchFamily="2" charset="-78"/>
+                <a:ea typeface="Amiri" pitchFamily="2" charset="-78"/>
                 <a:cs typeface="Amiri" pitchFamily="2" charset="-78"/>
               </a:rPr>
               <a:t>الآدَابُ بَيْنَ الأَمْسِ وَاليَوْمِ</a:t>
@@ -19443,6 +19599,7 @@
                   <a:srgbClr val="1B3B6F"/>
                 </a:solidFill>
                 <a:latin typeface="Amiri" pitchFamily="2" charset="-78"/>
+                <a:ea typeface="Amiri" pitchFamily="2" charset="-78"/>
                 <a:cs typeface="Amiri" pitchFamily="2" charset="-78"/>
               </a:rPr>
               <a:t>صَحِيحٌ أَنَّ … غَيْرَ أَنَّ …</a:t>
@@ -19519,6 +19676,7 @@
                   <a:srgbClr val="1B3B6F"/>
                 </a:solidFill>
                 <a:latin typeface="Amiri" pitchFamily="2" charset="-78"/>
+                <a:ea typeface="Amiri" pitchFamily="2" charset="-78"/>
                 <a:cs typeface="Amiri" pitchFamily="2" charset="-78"/>
               </a:rPr>
               <a:t>هَلْ مَا زَالَتِ الضِّيَافَةُ التَّقْلِيدِيَّةُ مُهِمَّةً؟</a:t>
@@ -19622,6 +19780,7 @@
                   <a:srgbClr val="1B3B6F"/>
                 </a:solidFill>
                 <a:latin typeface="Amiri" pitchFamily="2" charset="-78"/>
+                <a:ea typeface="Amiri" pitchFamily="2" charset="-78"/>
                 <a:cs typeface="Amiri" pitchFamily="2" charset="-78"/>
               </a:rPr>
               <a:t>مِنْ نَاحِيَةٍ … وَمِنْ نَاحِيَةٍ أُخْرَى …</a:t>
@@ -19698,6 +19857,7 @@
                   <a:srgbClr val="1B3B6F"/>
                 </a:solidFill>
                 <a:latin typeface="Amiri" pitchFamily="2" charset="-78"/>
+                <a:ea typeface="Amiri" pitchFamily="2" charset="-78"/>
                 <a:cs typeface="Amiri" pitchFamily="2" charset="-78"/>
               </a:rPr>
               <a:t>هَلْ آدَابُ المَائِدَةِ مُهِمَّةٌ أَمْ قَدِيمَةٌ؟</a:t>
@@ -19801,6 +19961,7 @@
                   <a:srgbClr val="1B3B6F"/>
                 </a:solidFill>
                 <a:latin typeface="Amiri" pitchFamily="2" charset="-78"/>
+                <a:ea typeface="Amiri" pitchFamily="2" charset="-78"/>
                 <a:cs typeface="Amiri" pitchFamily="2" charset="-78"/>
               </a:rPr>
               <a:t>يَنْبَغِي أَنْ … ؛ فَإِذَا … فَرُبَّمَا …</a:t>
@@ -19877,6 +20038,7 @@
                   <a:srgbClr val="1B3B6F"/>
                 </a:solidFill>
                 <a:latin typeface="Amiri" pitchFamily="2" charset="-78"/>
+                <a:ea typeface="Amiri" pitchFamily="2" charset="-78"/>
                 <a:cs typeface="Amiri" pitchFamily="2" charset="-78"/>
               </a:rPr>
               <a:t>كَيْفَ نَتَجَنَّبُ سُوءَ الفَهْمِ بَيْنَ الثَّقَافَاتِ؟</a:t>
@@ -19980,6 +20142,7 @@
                   <a:srgbClr val="1B3B6F"/>
                 </a:solidFill>
                 <a:latin typeface="Amiri" pitchFamily="2" charset="-78"/>
+                <a:ea typeface="Amiri" pitchFamily="2" charset="-78"/>
                 <a:cs typeface="Amiri" pitchFamily="2" charset="-78"/>
               </a:rPr>
               <a:t>أَكْرَمُ شَخْصٍ عَرَفْتُهُ … ؛ فَقَدْ …</a:t>
@@ -20056,6 +20219,7 @@
                   <a:srgbClr val="1B3B6F"/>
                 </a:solidFill>
                 <a:latin typeface="Amiri" pitchFamily="2" charset="-78"/>
+                <a:ea typeface="Amiri" pitchFamily="2" charset="-78"/>
                 <a:cs typeface="Amiri" pitchFamily="2" charset="-78"/>
               </a:rPr>
               <a:t>مَنْ أَكْرَمُ شَخْصٍ عَرَفْتَهُ؟</a:t>
@@ -20159,6 +20323,7 @@
                   <a:srgbClr val="1B3B6F"/>
                 </a:solidFill>
                 <a:latin typeface="Amiri" pitchFamily="2" charset="-78"/>
+                <a:ea typeface="Amiri" pitchFamily="2" charset="-78"/>
                 <a:cs typeface="Amiri" pitchFamily="2" charset="-78"/>
               </a:rPr>
               <a:t>لَوِ اسْتَقْبَلْتُهُ، لَقَرَأْتُ …</a:t>
@@ -20235,6 +20400,7 @@
                   <a:srgbClr val="1B3B6F"/>
                 </a:solidFill>
                 <a:latin typeface="Amiri" pitchFamily="2" charset="-78"/>
+                <a:ea typeface="Amiri" pitchFamily="2" charset="-78"/>
                 <a:cs typeface="Amiri" pitchFamily="2" charset="-78"/>
               </a:rPr>
               <a:t>لَوْ اسْتَقْبَلْتَ ضَيْفًا مِنْ ثَقَافَةٍ لَا تَعْرِفُهَا، مَاذَا تَفْعَلُ؟</a:t>
@@ -20444,6 +20610,7 @@
                   <a:srgbClr val="D4AF37"/>
                 </a:solidFill>
                 <a:latin typeface="Amiri" pitchFamily="2" charset="-78"/>
+                <a:ea typeface="Amiri" pitchFamily="2" charset="-78"/>
                 <a:cs typeface="Amiri" pitchFamily="2" charset="-78"/>
               </a:rPr>
               <a:t>م</a:t>
@@ -20764,6 +20931,7 @@
                   <a:srgbClr val="8A6D1E"/>
                 </a:solidFill>
                 <a:latin typeface="Amiri" pitchFamily="2" charset="-78"/>
+                <a:ea typeface="Amiri" pitchFamily="2" charset="-78"/>
                 <a:cs typeface="Amiri" pitchFamily="2" charset="-78"/>
               </a:rPr>
               <a:t>آدَابُ الصَّفِّ</a:t>
@@ -22295,6 +22463,7 @@
                   <a:srgbClr val="D4AF37"/>
                 </a:solidFill>
                 <a:latin typeface="Amiri" pitchFamily="2" charset="-78"/>
+                <a:ea typeface="Amiri" pitchFamily="2" charset="-78"/>
                 <a:cs typeface="Amiri" pitchFamily="2" charset="-78"/>
               </a:rPr>
               <a:t>م</a:t>
@@ -22615,6 +22784,7 @@
                   <a:srgbClr val="8A6D1E"/>
                 </a:solidFill>
                 <a:latin typeface="Amiri" pitchFamily="2" charset="-78"/>
+                <a:ea typeface="Amiri" pitchFamily="2" charset="-78"/>
                 <a:cs typeface="Amiri" pitchFamily="2" charset="-78"/>
               </a:rPr>
               <a:t>نَمُوذَجُ الإِجَابَةِ</a:t>
@@ -22857,6 +23027,7 @@
                   <a:srgbClr val="1B3B6F"/>
                 </a:solidFill>
                 <a:latin typeface="Amiri" pitchFamily="2" charset="-78"/>
+                <a:ea typeface="Amiri" pitchFamily="2" charset="-78"/>
                 <a:cs typeface="Amiri" pitchFamily="2" charset="-78"/>
               </a:rPr>
               <a:t>نُقَدِّمُ الشَّايَ وَالحَلَوِيَّاتِ.</a:t>
@@ -22933,6 +23104,7 @@
                   <a:srgbClr val="1B3B6F"/>
                 </a:solidFill>
                 <a:latin typeface="Amiri" pitchFamily="2" charset="-78"/>
+                <a:ea typeface="Amiri" pitchFamily="2" charset="-78"/>
                 <a:cs typeface="Amiri" pitchFamily="2" charset="-78"/>
               </a:rPr>
               <a:t>مَاذَا تُقَدِّمُ أُسْرَتُكَ لِلضُّيُوفِ؟</a:t>
@@ -23036,6 +23208,7 @@
                   <a:srgbClr val="1B3B6F"/>
                 </a:solidFill>
                 <a:latin typeface="Amiri" pitchFamily="2" charset="-78"/>
+                <a:ea typeface="Amiri" pitchFamily="2" charset="-78"/>
                 <a:cs typeface="Amiri" pitchFamily="2" charset="-78"/>
               </a:rPr>
               <a:t>نَعَمْ، نَخْلَعُهَا دَائِمًا عِنْدَ البَابِ.</a:t>
@@ -23112,6 +23285,7 @@
                   <a:srgbClr val="1B3B6F"/>
                 </a:solidFill>
                 <a:latin typeface="Amiri" pitchFamily="2" charset="-78"/>
+                <a:ea typeface="Amiri" pitchFamily="2" charset="-78"/>
                 <a:cs typeface="Amiri" pitchFamily="2" charset="-78"/>
               </a:rPr>
               <a:t>هَلْ تَخْلَعُونَ الأَحْذِيَةَ فِي البَيْتِ؟</a:t>
@@ -23215,6 +23389,7 @@
                   <a:srgbClr val="1B3B6F"/>
                 </a:solidFill>
                 <a:latin typeface="Amiri" pitchFamily="2" charset="-78"/>
+                <a:ea typeface="Amiri" pitchFamily="2" charset="-78"/>
                 <a:cs typeface="Amiri" pitchFamily="2" charset="-78"/>
               </a:rPr>
               <a:t>أُقَبِّلُ يَدَهُ وَأَقُولُ: "السَّلَامُ عَلَيْكُمْ".</a:t>
@@ -23291,6 +23466,7 @@
                   <a:srgbClr val="1B3B6F"/>
                 </a:solidFill>
                 <a:latin typeface="Amiri" pitchFamily="2" charset="-78"/>
+                <a:ea typeface="Amiri" pitchFamily="2" charset="-78"/>
                 <a:cs typeface="Amiri" pitchFamily="2" charset="-78"/>
               </a:rPr>
               <a:t>كَيْفَ تُحَيِّي جَدَّكَ؟</a:t>
@@ -23394,6 +23570,7 @@
                   <a:srgbClr val="1B3B6F"/>
                 </a:solidFill>
                 <a:latin typeface="Amiri" pitchFamily="2" charset="-78"/>
+                <a:ea typeface="Amiri" pitchFamily="2" charset="-78"/>
                 <a:cs typeface="Amiri" pitchFamily="2" charset="-78"/>
               </a:rPr>
               <a:t>اِمْدَحِ الطَّعَامَ، وَلَا تَتَأَخَّرْ.</a:t>
@@ -23470,6 +23647,7 @@
                   <a:srgbClr val="1B3B6F"/>
                 </a:solidFill>
                 <a:latin typeface="Amiri" pitchFamily="2" charset="-78"/>
+                <a:ea typeface="Amiri" pitchFamily="2" charset="-78"/>
                 <a:cs typeface="Amiri" pitchFamily="2" charset="-78"/>
               </a:rPr>
               <a:t>أَعْطِنِي نَصِيحَةً لِضَيْفٍ.</a:t>
@@ -23573,6 +23751,7 @@
                   <a:srgbClr val="1B3B6F"/>
                 </a:solidFill>
                 <a:latin typeface="Amiri" pitchFamily="2" charset="-78"/>
+                <a:ea typeface="Amiri" pitchFamily="2" charset="-78"/>
                 <a:cs typeface="Amiri" pitchFamily="2" charset="-78"/>
               </a:rPr>
               <a:t>نَعَمْ، أُحِبُّ ذٰلِكَ، لِأَنَّ البَيْتَ يُصْبِحُ مُمْتِعًا.</a:t>
@@ -23649,6 +23828,7 @@
                   <a:srgbClr val="1B3B6F"/>
                 </a:solidFill>
                 <a:latin typeface="Amiri" pitchFamily="2" charset="-78"/>
+                <a:ea typeface="Amiri" pitchFamily="2" charset="-78"/>
                 <a:cs typeface="Amiri" pitchFamily="2" charset="-78"/>
               </a:rPr>
               <a:t>هَلْ تُحِبُّ أَنْ تَسْتَقْبِلَ الضُّيُوفَ؟</a:t>
@@ -23858,6 +24038,7 @@
                   <a:srgbClr val="D4AF37"/>
                 </a:solidFill>
                 <a:latin typeface="Amiri" pitchFamily="2" charset="-78"/>
+                <a:ea typeface="Amiri" pitchFamily="2" charset="-78"/>
                 <a:cs typeface="Amiri" pitchFamily="2" charset="-78"/>
               </a:rPr>
               <a:t>م</a:t>
@@ -24178,6 +24359,7 @@
                   <a:srgbClr val="8A6D1E"/>
                 </a:solidFill>
                 <a:latin typeface="Amiri" pitchFamily="2" charset="-78"/>
+                <a:ea typeface="Amiri" pitchFamily="2" charset="-78"/>
                 <a:cs typeface="Amiri" pitchFamily="2" charset="-78"/>
               </a:rPr>
               <a:t>نَمُوذَجُ الإِجَابَةِ</a:t>
@@ -24420,6 +24602,7 @@
                   <a:srgbClr val="1B3B6F"/>
                 </a:solidFill>
                 <a:latin typeface="Amiri" pitchFamily="2" charset="-78"/>
+                <a:ea typeface="Amiri" pitchFamily="2" charset="-78"/>
                 <a:cs typeface="Amiri" pitchFamily="2" charset="-78"/>
               </a:rPr>
               <a:t>عِنْدَمَا نَزُورُ أَقَارِبَنَا نَحْمِلُ الحَلَوِيَّاتِ، ثُمَّ نَجْلِسُ سَاعَاتٍ، وَلَا نَخْرُجُ قَبْلَ أَنْ نَأْكُلَ.</a:t>
@@ -24496,6 +24679,7 @@
                   <a:srgbClr val="1B3B6F"/>
                 </a:solidFill>
                 <a:latin typeface="Amiri" pitchFamily="2" charset="-78"/>
+                <a:ea typeface="Amiri" pitchFamily="2" charset="-78"/>
                 <a:cs typeface="Amiri" pitchFamily="2" charset="-78"/>
               </a:rPr>
               <a:t>صِفْ زِيَارَةً عَائِلِيَّةً فِي ثَقَافَتِكَ.</a:t>
@@ -24599,6 +24783,7 @@
                   <a:srgbClr val="1B3B6F"/>
                 </a:solidFill>
                 <a:latin typeface="Amiri" pitchFamily="2" charset="-78"/>
+                <a:ea typeface="Amiri" pitchFamily="2" charset="-78"/>
                 <a:cs typeface="Amiri" pitchFamily="2" charset="-78"/>
               </a:rPr>
               <a:t>هُنَاكَ الزِّيَارَاتُ أَكْثَرُ عَدَدًا وَبِلَا مَوْعِدٍ، بَيْنَمَا هُنَا يَتَّصِلُ النَّاسُ قَبْلَ الزِّيَارَةِ بِأَيَّامٍ.</a:t>
@@ -24675,6 +24860,7 @@
                   <a:srgbClr val="1B3B6F"/>
                 </a:solidFill>
                 <a:latin typeface="Amiri" pitchFamily="2" charset="-78"/>
+                <a:ea typeface="Amiri" pitchFamily="2" charset="-78"/>
                 <a:cs typeface="Amiri" pitchFamily="2" charset="-78"/>
               </a:rPr>
               <a:t>مَا الفَرْقُ بَيْنَ الضِّيَافَةِ هُنَا وَفِي بَلَدِ أَجْدَادِكَ؟</a:t>
@@ -24778,6 +24964,7 @@
                   <a:srgbClr val="1B3B6F"/>
                 </a:solidFill>
                 <a:latin typeface="Amiri" pitchFamily="2" charset="-78"/>
+                <a:ea typeface="Amiri" pitchFamily="2" charset="-78"/>
                 <a:cs typeface="Amiri" pitchFamily="2" charset="-78"/>
               </a:rPr>
               <a:t>أَوَّلًا، اِقْبَلِ القَهْوَةَ؛ وَيَنْبَغِي أَنْ تَأْكُلَ بِيَدِكَ اليُمْنَى، وَلَا تَرْفُضِ الطَّعَامَ بِسُرْعَةٍ.</a:t>
@@ -24854,6 +25041,7 @@
                   <a:srgbClr val="1B3B6F"/>
                 </a:solidFill>
                 <a:latin typeface="Amiri" pitchFamily="2" charset="-78"/>
+                <a:ea typeface="Amiri" pitchFamily="2" charset="-78"/>
                 <a:cs typeface="Amiri" pitchFamily="2" charset="-78"/>
               </a:rPr>
               <a:t>مَا النَّصَائِحُ الَّتِي تُعْطِيهَا لِضَيْفٍ أَجْنَبِيٍّ؟</a:t>
@@ -24957,6 +25145,7 @@
                   <a:srgbClr val="1B3B6F"/>
                 </a:solidFill>
                 <a:latin typeface="Amiri" pitchFamily="2" charset="-78"/>
+                <a:ea typeface="Amiri" pitchFamily="2" charset="-78"/>
                 <a:cs typeface="Amiri" pitchFamily="2" charset="-78"/>
               </a:rPr>
               <a:t>كَانَتْ جَدَّتِي تَطْبُخُ كُلَّ شَيْءٍ بِيَدِهَا، أَمَّا أُمِّي فَتَطْلُبُ بَعْضَ الأَطْبَاقِ مِنَ المَطْعَمِ، لِأَنَّهَا تَعْمَلُ.</a:t>
@@ -25033,6 +25222,7 @@
                   <a:srgbClr val="1B3B6F"/>
                 </a:solidFill>
                 <a:latin typeface="Amiri" pitchFamily="2" charset="-78"/>
+                <a:ea typeface="Amiri" pitchFamily="2" charset="-78"/>
                 <a:cs typeface="Amiri" pitchFamily="2" charset="-78"/>
               </a:rPr>
               <a:t>هَلْ تَغَيَّرَتْ عَادَاتُ الضِّيَافَةِ فِي أُسْرَتِكَ؟</a:t>
@@ -25136,6 +25326,7 @@
                   <a:srgbClr val="1B3B6F"/>
                 </a:solidFill>
                 <a:latin typeface="Amiri" pitchFamily="2" charset="-78"/>
+                <a:ea typeface="Amiri" pitchFamily="2" charset="-78"/>
                 <a:cs typeface="Amiri" pitchFamily="2" charset="-78"/>
               </a:rPr>
               <a:t>سَأُرَحِّبُ بِهِمْ كَمَا يَفْعَلُ جَدِّي، وَسَأُقَدِّمُ لَهُمُ القَهْوَةَ العَرَبِيَّةَ وَالكَعْكَ الإِنْجْلِيزِيَّ مَعًا!</a:t>
@@ -25212,6 +25403,7 @@
                   <a:srgbClr val="1B3B6F"/>
                 </a:solidFill>
                 <a:latin typeface="Amiri" pitchFamily="2" charset="-78"/>
+                <a:ea typeface="Amiri" pitchFamily="2" charset="-78"/>
                 <a:cs typeface="Amiri" pitchFamily="2" charset="-78"/>
               </a:rPr>
               <a:t>كَيْفَ سَتَسْتَقْبِلُ ضُيُوفَكَ فِي المُسْتَقْبَلِ؟</a:t>
@@ -25421,6 +25613,7 @@
                   <a:srgbClr val="D4AF37"/>
                 </a:solidFill>
                 <a:latin typeface="Amiri" pitchFamily="2" charset="-78"/>
+                <a:ea typeface="Amiri" pitchFamily="2" charset="-78"/>
                 <a:cs typeface="Amiri" pitchFamily="2" charset="-78"/>
               </a:rPr>
               <a:t>م</a:t>
@@ -25741,6 +25934,7 @@
                   <a:srgbClr val="8A6D1E"/>
                 </a:solidFill>
                 <a:latin typeface="Amiri" pitchFamily="2" charset="-78"/>
+                <a:ea typeface="Amiri" pitchFamily="2" charset="-78"/>
                 <a:cs typeface="Amiri" pitchFamily="2" charset="-78"/>
               </a:rPr>
               <a:t>نَمُوذَجُ الإِجَابَةِ</a:t>
@@ -25983,6 +26177,7 @@
                   <a:srgbClr val="1B3B6F"/>
                 </a:solidFill>
                 <a:latin typeface="Amiri" pitchFamily="2" charset="-78"/>
+                <a:ea typeface="Amiri" pitchFamily="2" charset="-78"/>
                 <a:cs typeface="Amiri" pitchFamily="2" charset="-78"/>
               </a:rPr>
               <a:t>صَحِيحٌ أَنَّ الحَيَاةَ أَصْبَحَتْ أَسْرَعَ، غَيْرَ أَنَّ الضِّيَافَةَ هِيَ مَا يَجْعَلُ الغَرِيبَ يَشْعُرُ بِأَنَّهُ فِي بَيْتِهِ؛ لِذٰلِكَ هِيَ أَهَمُّ مِنْ أَيِّ وَقْتٍ مَضَى.</a:t>
@@ -26059,6 +26254,7 @@
                   <a:srgbClr val="1B3B6F"/>
                 </a:solidFill>
                 <a:latin typeface="Amiri" pitchFamily="2" charset="-78"/>
+                <a:ea typeface="Amiri" pitchFamily="2" charset="-78"/>
                 <a:cs typeface="Amiri" pitchFamily="2" charset="-78"/>
               </a:rPr>
               <a:t>هَلْ مَا زَالَتِ الضِّيَافَةُ التَّقْلِيدِيَّةُ مُهِمَّةً؟</a:t>
@@ -26162,6 +26358,7 @@
                   <a:srgbClr val="1B3B6F"/>
                 </a:solidFill>
                 <a:latin typeface="Amiri" pitchFamily="2" charset="-78"/>
+                <a:ea typeface="Amiri" pitchFamily="2" charset="-78"/>
                 <a:cs typeface="Amiri" pitchFamily="2" charset="-78"/>
               </a:rPr>
               <a:t>مِنْ نَاحِيَةٍ، بَعْضُهَا شَكْلِيٌّ، كَتَرْتِيبِ السَّكَاكِينِ، وَمِنْ نَاحِيَةٍ أُخْرَى، أَغْلَبُهَا يُعَبِّرُ عَنِ الاحْتِرَامِ، كَانْتِظَارِ الكِبَارِ قَبْلَ الأَكْلِ.</a:t>
@@ -26238,6 +26435,7 @@
                   <a:srgbClr val="1B3B6F"/>
                 </a:solidFill>
                 <a:latin typeface="Amiri" pitchFamily="2" charset="-78"/>
+                <a:ea typeface="Amiri" pitchFamily="2" charset="-78"/>
                 <a:cs typeface="Amiri" pitchFamily="2" charset="-78"/>
               </a:rPr>
               <a:t>هَلْ آدَابُ المَائِدَةِ مُهِمَّةٌ أَمْ قَدِيمَةٌ؟</a:t>
@@ -26341,6 +26539,7 @@
                   <a:srgbClr val="1B3B6F"/>
                 </a:solidFill>
                 <a:latin typeface="Amiri" pitchFamily="2" charset="-78"/>
+                <a:ea typeface="Amiri" pitchFamily="2" charset="-78"/>
                 <a:cs typeface="Amiri" pitchFamily="2" charset="-78"/>
               </a:rPr>
               <a:t>يَنْبَغِي أَنْ نَسْأَلَ قَبْلَ أَنْ نَحْكُمَ؛ فَإِذَا رَفَضَ ضَيْفٌ الطَّعَامَ مَثَلًا، فَرُبَّمَا يَصُومُ أَوْ لَا يَأْكُلُ اللَّحْمَ، وَلَيْسَ قَلِيلَ أَدَبٍ.</a:t>
@@ -26417,6 +26616,7 @@
                   <a:srgbClr val="1B3B6F"/>
                 </a:solidFill>
                 <a:latin typeface="Amiri" pitchFamily="2" charset="-78"/>
+                <a:ea typeface="Amiri" pitchFamily="2" charset="-78"/>
                 <a:cs typeface="Amiri" pitchFamily="2" charset="-78"/>
               </a:rPr>
               <a:t>كَيْفَ نَتَجَنَّبُ سُوءَ الفَهْمِ بَيْنَ الثَّقَافَاتِ؟</a:t>
@@ -26626,6 +26826,7 @@
                   <a:srgbClr val="D4AF37"/>
                 </a:solidFill>
                 <a:latin typeface="Amiri" pitchFamily="2" charset="-78"/>
+                <a:ea typeface="Amiri" pitchFamily="2" charset="-78"/>
                 <a:cs typeface="Amiri" pitchFamily="2" charset="-78"/>
               </a:rPr>
               <a:t>م</a:t>
@@ -26946,6 +27147,7 @@
                   <a:srgbClr val="8A6D1E"/>
                 </a:solidFill>
                 <a:latin typeface="Amiri" pitchFamily="2" charset="-78"/>
+                <a:ea typeface="Amiri" pitchFamily="2" charset="-78"/>
                 <a:cs typeface="Amiri" pitchFamily="2" charset="-78"/>
               </a:rPr>
               <a:t>نَمُوذَجُ الإِجَابَةِ</a:t>
@@ -27188,6 +27390,7 @@
                   <a:srgbClr val="1B3B6F"/>
                 </a:solidFill>
                 <a:latin typeface="Amiri" pitchFamily="2" charset="-78"/>
+                <a:ea typeface="Amiri" pitchFamily="2" charset="-78"/>
                 <a:cs typeface="Amiri" pitchFamily="2" charset="-78"/>
               </a:rPr>
               <a:t>أَكْرَمُ شَخْصٍ عَرَفْتُهُ جَارُنَا العَجُوزُ؛ فَقَدْ كَانَ يَطْبُخُ لِكُلِّ عَائِلَةٍ جَدِيدَةٍ فِي الشَّارِعِ، مَعَ أَنَّهُ كَانَ فَقِيرًا.</a:t>
@@ -27264,6 +27467,7 @@
                   <a:srgbClr val="1B3B6F"/>
                 </a:solidFill>
                 <a:latin typeface="Amiri" pitchFamily="2" charset="-78"/>
+                <a:ea typeface="Amiri" pitchFamily="2" charset="-78"/>
                 <a:cs typeface="Amiri" pitchFamily="2" charset="-78"/>
               </a:rPr>
               <a:t>مَنْ أَكْرَمُ شَخْصٍ عَرَفْتَهُ؟</a:t>
@@ -27367,6 +27571,7 @@
                   <a:srgbClr val="1B3B6F"/>
                 </a:solidFill>
                 <a:latin typeface="Amiri" pitchFamily="2" charset="-78"/>
+                <a:ea typeface="Amiri" pitchFamily="2" charset="-78"/>
                 <a:cs typeface="Amiri" pitchFamily="2" charset="-78"/>
               </a:rPr>
               <a:t>لَوِ اسْتَقْبَلْتُهُ، لَقَرَأْتُ عَنْ عَادَاتِهِ أَوَّلًا، وَلَسَأَلْتُهُ عَمَّا لَا يَأْكُلُهُ، وَلَطَلَبْتُ مِنْهُ أَنْ يُعَلِّمَنِي تَحِيَّةً بِلُغَتِهِ.</a:t>
@@ -27446,6 +27651,7 @@
                   <a:srgbClr val="1B3B6F"/>
                 </a:solidFill>
                 <a:latin typeface="Amiri" pitchFamily="2" charset="-78"/>
+                <a:ea typeface="Amiri" pitchFamily="2" charset="-78"/>
                 <a:cs typeface="Amiri" pitchFamily="2" charset="-78"/>
               </a:rPr>
               <a:t>لَوْ اسْتَقْبَلْتَ ضَيْفًا مِنْ ثَقَافَةٍ لَا تَعْرِفُهَا، مَاذَا تَفْعَلُ؟</a:t>
@@ -27655,6 +27861,7 @@
                   <a:srgbClr val="D4AF37"/>
                 </a:solidFill>
                 <a:latin typeface="Amiri" pitchFamily="2" charset="-78"/>
+                <a:ea typeface="Amiri" pitchFamily="2" charset="-78"/>
                 <a:cs typeface="Amiri" pitchFamily="2" charset="-78"/>
               </a:rPr>
               <a:t>م</a:t>
@@ -27975,6 +28182,7 @@
                   <a:srgbClr val="8A6D1E"/>
                 </a:solidFill>
                 <a:latin typeface="Amiri" pitchFamily="2" charset="-78"/>
+                <a:ea typeface="Amiri" pitchFamily="2" charset="-78"/>
                 <a:cs typeface="Amiri" pitchFamily="2" charset="-78"/>
               </a:rPr>
               <a:t>قَيِّمْ عَمَلَكَ</a:t>
@@ -29219,6 +29427,7 @@
                   <a:srgbClr val="FFFFFF"/>
                 </a:solidFill>
                 <a:latin typeface="Amiri" pitchFamily="2" charset="-78"/>
+                <a:ea typeface="Amiri" pitchFamily="2" charset="-78"/>
                 <a:cs typeface="Amiri" pitchFamily="2" charset="-78"/>
               </a:rPr>
               <a:t>أَحْسَنْتُمْ! إِلَى اللِّقَاءِ</a:t>
@@ -29371,6 +29580,7 @@
                   <a:srgbClr val="D4AF37"/>
                 </a:solidFill>
                 <a:latin typeface="Amiri" pitchFamily="2" charset="-78"/>
+                <a:ea typeface="Amiri" pitchFamily="2" charset="-78"/>
                 <a:cs typeface="Amiri" pitchFamily="2" charset="-78"/>
               </a:rPr>
               <a:t>وَرْشَةُ الكِتَابَةِ</a:t>
@@ -29504,6 +29714,7 @@
                   <a:srgbClr val="D4AF37"/>
                 </a:solidFill>
                 <a:latin typeface="Amiri" pitchFamily="2" charset="-78"/>
+                <a:ea typeface="Amiri" pitchFamily="2" charset="-78"/>
                 <a:cs typeface="Amiri" pitchFamily="2" charset="-78"/>
               </a:rPr>
               <a:t>م</a:t>
@@ -29824,6 +30035,7 @@
                   <a:srgbClr val="8A6D1E"/>
                 </a:solidFill>
                 <a:latin typeface="Amiri" pitchFamily="2" charset="-78"/>
+                <a:ea typeface="Amiri" pitchFamily="2" charset="-78"/>
                 <a:cs typeface="Amiri" pitchFamily="2" charset="-78"/>
               </a:rPr>
               <a:t>خَرِيطَةُ الوَرْشَةِ</a:t>
@@ -30138,6 +30350,7 @@
                   <a:srgbClr val="1B3B6F"/>
                 </a:solidFill>
                 <a:latin typeface="Amiri" pitchFamily="2" charset="-78"/>
+                <a:ea typeface="Amiri" pitchFamily="2" charset="-78"/>
                 <a:cs typeface="Amiri" pitchFamily="2" charset="-78"/>
               </a:rPr>
               <a:t>كَيْفَ</a:t>
@@ -30414,6 +30627,7 @@
                   <a:srgbClr val="1E6B52"/>
                 </a:solidFill>
                 <a:latin typeface="Amiri" pitchFamily="2" charset="-78"/>
+                <a:ea typeface="Amiri" pitchFamily="2" charset="-78"/>
                 <a:cs typeface="Amiri" pitchFamily="2" charset="-78"/>
               </a:rPr>
               <a:t>تَمْثِيلُ الدَّوْرِ</a:t>
@@ -30690,6 +30904,7 @@
                   <a:srgbClr val="8A6D1E"/>
                 </a:solidFill>
                 <a:latin typeface="Amiri" pitchFamily="2" charset="-78"/>
+                <a:ea typeface="Amiri" pitchFamily="2" charset="-78"/>
                 <a:cs typeface="Amiri" pitchFamily="2" charset="-78"/>
               </a:rPr>
               <a:t>النَّمُوذَجُ</a:t>
@@ -30966,6 +31181,7 @@
                   <a:srgbClr val="1E6B52"/>
                 </a:solidFill>
                 <a:latin typeface="Amiri" pitchFamily="2" charset="-78"/>
+                <a:ea typeface="Amiri" pitchFamily="2" charset="-78"/>
                 <a:cs typeface="Amiri" pitchFamily="2" charset="-78"/>
               </a:rPr>
               <a:t>المُحَادَثَةُ</a:t>
@@ -31242,6 +31458,7 @@
                   <a:srgbClr val="8A6D1E"/>
                 </a:solidFill>
                 <a:latin typeface="Amiri" pitchFamily="2" charset="-78"/>
+                <a:ea typeface="Amiri" pitchFamily="2" charset="-78"/>
                 <a:cs typeface="Amiri" pitchFamily="2" charset="-78"/>
               </a:rPr>
               <a:t>قَيِّمْ</a:t>
@@ -31485,6 +31702,7 @@
                   <a:srgbClr val="D4AF37"/>
                 </a:solidFill>
                 <a:latin typeface="Amiri" pitchFamily="2" charset="-78"/>
+                <a:ea typeface="Amiri" pitchFamily="2" charset="-78"/>
                 <a:cs typeface="Amiri" pitchFamily="2" charset="-78"/>
               </a:rPr>
               <a:t>م</a:t>
@@ -31805,6 +32023,7 @@
                   <a:srgbClr val="8A6D1E"/>
                 </a:solidFill>
                 <a:latin typeface="Amiri" pitchFamily="2" charset="-78"/>
+                <a:ea typeface="Amiri" pitchFamily="2" charset="-78"/>
                 <a:cs typeface="Amiri" pitchFamily="2" charset="-78"/>
               </a:rPr>
               <a:t>امْتِحَانُ التَّحَدُّثِ</a:t>
@@ -32429,6 +32648,7 @@
                   <a:srgbClr val="1B3B6F"/>
                 </a:solidFill>
                 <a:latin typeface="Amiri" pitchFamily="2" charset="-78"/>
+                <a:ea typeface="Amiri" pitchFamily="2" charset="-78"/>
                 <a:cs typeface="Amiri" pitchFamily="2" charset="-78"/>
               </a:rPr>
               <a:t>عَفْوًا، هَلْ يُمْكِنُ أَنْ تُعِيدَ السُّؤَالَ؟</a:t>
@@ -32528,6 +32748,7 @@
                   <a:srgbClr val="1B3B6F"/>
                 </a:solidFill>
                 <a:latin typeface="Amiri" pitchFamily="2" charset="-78"/>
+                <a:ea typeface="Amiri" pitchFamily="2" charset="-78"/>
                 <a:cs typeface="Amiri" pitchFamily="2" charset="-78"/>
               </a:rPr>
               <a:t>لَحْظَةً، دَعْنِي أُفَكِّرُ …</a:t>
@@ -32627,6 +32848,7 @@
                   <a:srgbClr val="1B3B6F"/>
                 </a:solidFill>
                 <a:latin typeface="Amiri" pitchFamily="2" charset="-78"/>
+                <a:ea typeface="Amiri" pitchFamily="2" charset="-78"/>
                 <a:cs typeface="Amiri" pitchFamily="2" charset="-78"/>
               </a:rPr>
               <a:t>أَقْصِدُ …</a:t>
@@ -32798,6 +33020,7 @@
                   <a:srgbClr val="D4AF37"/>
                 </a:solidFill>
                 <a:latin typeface="Amiri" pitchFamily="2" charset="-78"/>
+                <a:ea typeface="Amiri" pitchFamily="2" charset="-78"/>
                 <a:cs typeface="Amiri" pitchFamily="2" charset="-78"/>
               </a:rPr>
               <a:t>م</a:t>
@@ -33118,6 +33341,7 @@
                   <a:srgbClr val="8A6D1E"/>
                 </a:solidFill>
                 <a:latin typeface="Amiri" pitchFamily="2" charset="-78"/>
+                <a:ea typeface="Amiri" pitchFamily="2" charset="-78"/>
                 <a:cs typeface="Amiri" pitchFamily="2" charset="-78"/>
               </a:rPr>
               <a:t>الأَمْرُ وَالنَّصِيحَةُ</a:t>
@@ -33421,6 +33645,7 @@
                   <a:srgbClr val="1B3B6F"/>
                 </a:solidFill>
                 <a:latin typeface="Amiri" pitchFamily="2" charset="-78"/>
+                <a:ea typeface="Amiri" pitchFamily="2" charset="-78"/>
                 <a:cs typeface="Amiri" pitchFamily="2" charset="-78"/>
               </a:rPr>
               <a:t>ضَيْفٌ</a:t>
@@ -33578,6 +33803,7 @@
                   <a:srgbClr val="1B3B6F"/>
                 </a:solidFill>
                 <a:latin typeface="Amiri" pitchFamily="2" charset="-78"/>
+                <a:ea typeface="Amiri" pitchFamily="2" charset="-78"/>
                 <a:cs typeface="Amiri" pitchFamily="2" charset="-78"/>
               </a:rPr>
               <a:t>ضُيُوفٌ</a:t>
@@ -33681,6 +33907,7 @@
                   <a:srgbClr val="1B3B6F"/>
                 </a:solidFill>
                 <a:latin typeface="Amiri" pitchFamily="2" charset="-78"/>
+                <a:ea typeface="Amiri" pitchFamily="2" charset="-78"/>
                 <a:cs typeface="Amiri" pitchFamily="2" charset="-78"/>
               </a:rPr>
               <a:t>ضَيْفَةٌ</a:t>
@@ -33946,6 +34173,7 @@
                   <a:srgbClr val="1B3B6F"/>
                 </a:solidFill>
                 <a:latin typeface="Amiri" pitchFamily="2" charset="-78"/>
+                <a:ea typeface="Amiri" pitchFamily="2" charset="-78"/>
                 <a:cs typeface="Amiri" pitchFamily="2" charset="-78"/>
               </a:rPr>
               <a:t>مُضِيفٌ</a:t>
@@ -34103,6 +34331,7 @@
                   <a:srgbClr val="1B3B6F"/>
                 </a:solidFill>
                 <a:latin typeface="Amiri" pitchFamily="2" charset="-78"/>
+                <a:ea typeface="Amiri" pitchFamily="2" charset="-78"/>
                 <a:cs typeface="Amiri" pitchFamily="2" charset="-78"/>
               </a:rPr>
               <a:t>الضِّيَافَةُ</a:t>
@@ -34206,6 +34435,7 @@
                   <a:srgbClr val="1B3B6F"/>
                 </a:solidFill>
                 <a:latin typeface="Amiri" pitchFamily="2" charset="-78"/>
+                <a:ea typeface="Amiri" pitchFamily="2" charset="-78"/>
                 <a:cs typeface="Amiri" pitchFamily="2" charset="-78"/>
               </a:rPr>
               <a:t>مُضِيفَةٌ</a:t>
@@ -34471,6 +34701,7 @@
                   <a:srgbClr val="1B3B6F"/>
                 </a:solidFill>
                 <a:latin typeface="Amiri" pitchFamily="2" charset="-78"/>
+                <a:ea typeface="Amiri" pitchFamily="2" charset="-78"/>
                 <a:cs typeface="Amiri" pitchFamily="2" charset="-78"/>
               </a:rPr>
               <a:t>كَرِيمٌ</a:t>
@@ -34628,6 +34859,7 @@
                   <a:srgbClr val="1B3B6F"/>
                 </a:solidFill>
                 <a:latin typeface="Amiri" pitchFamily="2" charset="-78"/>
+                <a:ea typeface="Amiri" pitchFamily="2" charset="-78"/>
                 <a:cs typeface="Amiri" pitchFamily="2" charset="-78"/>
               </a:rPr>
               <a:t>أَكْرَمُ مِنْ</a:t>
@@ -34731,6 +34963,7 @@
                   <a:srgbClr val="1B3B6F"/>
                 </a:solidFill>
                 <a:latin typeface="Amiri" pitchFamily="2" charset="-78"/>
+                <a:ea typeface="Amiri" pitchFamily="2" charset="-78"/>
                 <a:cs typeface="Amiri" pitchFamily="2" charset="-78"/>
               </a:rPr>
               <a:t>كَرِيمَةٌ</a:t>
@@ -34996,6 +35229,7 @@
                   <a:srgbClr val="1B3B6F"/>
                 </a:solidFill>
                 <a:latin typeface="Amiri" pitchFamily="2" charset="-78"/>
+                <a:ea typeface="Amiri" pitchFamily="2" charset="-78"/>
                 <a:cs typeface="Amiri" pitchFamily="2" charset="-78"/>
               </a:rPr>
               <a:t>آدَابٌ</a:t>
@@ -35153,6 +35387,7 @@
                   <a:srgbClr val="1B3B6F"/>
                 </a:solidFill>
                 <a:latin typeface="Amiri" pitchFamily="2" charset="-78"/>
+                <a:ea typeface="Amiri" pitchFamily="2" charset="-78"/>
                 <a:cs typeface="Amiri" pitchFamily="2" charset="-78"/>
               </a:rPr>
               <a:t>قَلِيلُ الأَدَبِ</a:t>
@@ -35256,6 +35491,7 @@
                   <a:srgbClr val="1B3B6F"/>
                 </a:solidFill>
                 <a:latin typeface="Amiri" pitchFamily="2" charset="-78"/>
+                <a:ea typeface="Amiri" pitchFamily="2" charset="-78"/>
                 <a:cs typeface="Amiri" pitchFamily="2" charset="-78"/>
               </a:rPr>
               <a:t>مُؤَدَّبٌ · مُؤَدَّبَةٌ</a:t>
@@ -35521,6 +35757,7 @@
                   <a:srgbClr val="1B3B6F"/>
                 </a:solidFill>
                 <a:latin typeface="Amiri" pitchFamily="2" charset="-78"/>
+                <a:ea typeface="Amiri" pitchFamily="2" charset="-78"/>
                 <a:cs typeface="Amiri" pitchFamily="2" charset="-78"/>
               </a:rPr>
               <a:t>اِخْلَعْ حِذَاءَكَ</a:t>
@@ -35678,6 +35915,7 @@
                   <a:srgbClr val="1B3B6F"/>
                 </a:solidFill>
                 <a:latin typeface="Amiri" pitchFamily="2" charset="-78"/>
+                <a:ea typeface="Amiri" pitchFamily="2" charset="-78"/>
                 <a:cs typeface="Amiri" pitchFamily="2" charset="-78"/>
               </a:rPr>
               <a:t>اِخْلَعُوا أَحْذِيَتَكُمْ</a:t>
@@ -35781,6 +36019,7 @@
                   <a:srgbClr val="1B3B6F"/>
                 </a:solidFill>
                 <a:latin typeface="Amiri" pitchFamily="2" charset="-78"/>
+                <a:ea typeface="Amiri" pitchFamily="2" charset="-78"/>
                 <a:cs typeface="Amiri" pitchFamily="2" charset="-78"/>
               </a:rPr>
               <a:t>اِخْلَعِي حِذَاءَكِ</a:t>
@@ -36046,6 +36285,7 @@
                   <a:srgbClr val="1B3B6F"/>
                 </a:solidFill>
                 <a:latin typeface="Amiri" pitchFamily="2" charset="-78"/>
+                <a:ea typeface="Amiri" pitchFamily="2" charset="-78"/>
                 <a:cs typeface="Amiri" pitchFamily="2" charset="-78"/>
               </a:rPr>
               <a:t>لَا تَنْسَ</a:t>
@@ -36203,6 +36443,7 @@
                   <a:srgbClr val="1B3B6F"/>
                 </a:solidFill>
                 <a:latin typeface="Amiri" pitchFamily="2" charset="-78"/>
+                <a:ea typeface="Amiri" pitchFamily="2" charset="-78"/>
                 <a:cs typeface="Amiri" pitchFamily="2" charset="-78"/>
               </a:rPr>
               <a:t>لَا تَنْسَوْا</a:t>
@@ -36306,6 +36547,7 @@
                   <a:srgbClr val="1B3B6F"/>
                 </a:solidFill>
                 <a:latin typeface="Amiri" pitchFamily="2" charset="-78"/>
+                <a:ea typeface="Amiri" pitchFamily="2" charset="-78"/>
                 <a:cs typeface="Amiri" pitchFamily="2" charset="-78"/>
               </a:rPr>
               <a:t>لَا تَنْسَيْ</a:t>
@@ -36439,6 +36681,7 @@
                   <a:srgbClr val="D4AF37"/>
                 </a:solidFill>
                 <a:latin typeface="Amiri" pitchFamily="2" charset="-78"/>
+                <a:ea typeface="Amiri" pitchFamily="2" charset="-78"/>
                 <a:cs typeface="Amiri" pitchFamily="2" charset="-78"/>
               </a:rPr>
               <a:t>م</a:t>
@@ -36759,6 +37002,7 @@
                   <a:srgbClr val="8A6D1E"/>
                 </a:solidFill>
                 <a:latin typeface="Amiri" pitchFamily="2" charset="-78"/>
+                <a:ea typeface="Amiri" pitchFamily="2" charset="-78"/>
                 <a:cs typeface="Amiri" pitchFamily="2" charset="-78"/>
               </a:rPr>
               <a:t>عِبَارَاتُ المُجَامَلَةِ وَالمُقَارَنَةُ</a:t>
@@ -37062,6 +37306,7 @@
                   <a:srgbClr val="1B3B6F"/>
                 </a:solidFill>
                 <a:latin typeface="Amiri" pitchFamily="2" charset="-78"/>
+                <a:ea typeface="Amiri" pitchFamily="2" charset="-78"/>
                 <a:cs typeface="Amiri" pitchFamily="2" charset="-78"/>
               </a:rPr>
               <a:t>يَنْبَغِي أَنْ …</a:t>
@@ -37219,6 +37464,7 @@
                   <a:srgbClr val="1B3B6F"/>
                 </a:solidFill>
                 <a:latin typeface="Amiri" pitchFamily="2" charset="-78"/>
+                <a:ea typeface="Amiri" pitchFamily="2" charset="-78"/>
                 <a:cs typeface="Amiri" pitchFamily="2" charset="-78"/>
               </a:rPr>
               <a:t>عَلَيْكَ أَنْ</a:t>
@@ -37322,6 +37568,7 @@
                   <a:srgbClr val="1B3B6F"/>
                 </a:solidFill>
                 <a:latin typeface="Amiri" pitchFamily="2" charset="-78"/>
+                <a:ea typeface="Amiri" pitchFamily="2" charset="-78"/>
                 <a:cs typeface="Amiri" pitchFamily="2" charset="-78"/>
               </a:rPr>
               <a:t>مِنَ الأَفْضَلِ أَنْ</a:t>
@@ -37587,6 +37834,7 @@
                   <a:srgbClr val="1B3B6F"/>
                 </a:solidFill>
                 <a:latin typeface="Amiri" pitchFamily="2" charset="-78"/>
+                <a:ea typeface="Amiri" pitchFamily="2" charset="-78"/>
                 <a:cs typeface="Amiri" pitchFamily="2" charset="-78"/>
               </a:rPr>
               <a:t>تَفَضَّلْ</a:t>
@@ -37744,6 +37992,7 @@
                   <a:srgbClr val="1B3B6F"/>
                 </a:solidFill>
                 <a:latin typeface="Amiri" pitchFamily="2" charset="-78"/>
+                <a:ea typeface="Amiri" pitchFamily="2" charset="-78"/>
                 <a:cs typeface="Amiri" pitchFamily="2" charset="-78"/>
               </a:rPr>
               <a:t>تَفَضَّلُوا</a:t>
@@ -37847,6 +38096,7 @@
                   <a:srgbClr val="1B3B6F"/>
                 </a:solidFill>
                 <a:latin typeface="Amiri" pitchFamily="2" charset="-78"/>
+                <a:ea typeface="Amiri" pitchFamily="2" charset="-78"/>
                 <a:cs typeface="Amiri" pitchFamily="2" charset="-78"/>
               </a:rPr>
               <a:t>تَفَضَّلِي</a:t>
@@ -38112,6 +38362,7 @@
                   <a:srgbClr val="1B3B6F"/>
                 </a:solidFill>
                 <a:latin typeface="Amiri" pitchFamily="2" charset="-78"/>
+                <a:ea typeface="Amiri" pitchFamily="2" charset="-78"/>
                 <a:cs typeface="Amiri" pitchFamily="2" charset="-78"/>
               </a:rPr>
               <a:t>سُفْرَةٌ دَائِمَةٌ</a:t>
@@ -38269,6 +38520,7 @@
                   <a:srgbClr val="1B3B6F"/>
                 </a:solidFill>
                 <a:latin typeface="Amiri" pitchFamily="2" charset="-78"/>
+                <a:ea typeface="Amiri" pitchFamily="2" charset="-78"/>
                 <a:cs typeface="Amiri" pitchFamily="2" charset="-78"/>
               </a:rPr>
               <a:t>بِالهَنَاءِ وَالشِّفَاءِ</a:t>
@@ -38372,6 +38624,7 @@
                   <a:srgbClr val="1B3B6F"/>
                 </a:solidFill>
                 <a:latin typeface="Amiri" pitchFamily="2" charset="-78"/>
+                <a:ea typeface="Amiri" pitchFamily="2" charset="-78"/>
                 <a:cs typeface="Amiri" pitchFamily="2" charset="-78"/>
               </a:rPr>
               <a:t>دَامَتْ أَيَّامُكَ</a:t>
@@ -38637,6 +38890,7 @@
                   <a:srgbClr val="1B3B6F"/>
                 </a:solidFill>
                 <a:latin typeface="Amiri" pitchFamily="2" charset="-78"/>
+                <a:ea typeface="Amiri" pitchFamily="2" charset="-78"/>
                 <a:cs typeface="Amiri" pitchFamily="2" charset="-78"/>
               </a:rPr>
               <a:t>أُصَافِحُ</a:t>
@@ -38794,6 +39048,7 @@
                   <a:srgbClr val="1B3B6F"/>
                 </a:solidFill>
                 <a:latin typeface="Amiri" pitchFamily="2" charset="-78"/>
+                <a:ea typeface="Amiri" pitchFamily="2" charset="-78"/>
                 <a:cs typeface="Amiri" pitchFamily="2" charset="-78"/>
               </a:rPr>
               <a:t>أُقَبِّلُ</a:t>
@@ -38897,6 +39152,7 @@
                   <a:srgbClr val="1B3B6F"/>
                 </a:solidFill>
                 <a:latin typeface="Amiri" pitchFamily="2" charset="-78"/>
+                <a:ea typeface="Amiri" pitchFamily="2" charset="-78"/>
                 <a:cs typeface="Amiri" pitchFamily="2" charset="-78"/>
               </a:rPr>
               <a:t>أُحَيِّي</a:t>
@@ -39162,6 +39418,7 @@
                   <a:srgbClr val="1B3B6F"/>
                 </a:solidFill>
                 <a:latin typeface="Amiri" pitchFamily="2" charset="-78"/>
+                <a:ea typeface="Amiri" pitchFamily="2" charset="-78"/>
                 <a:cs typeface="Amiri" pitchFamily="2" charset="-78"/>
               </a:rPr>
               <a:t>عَيْبٌ</a:t>
@@ -39319,6 +39576,7 @@
                   <a:srgbClr val="1B3B6F"/>
                 </a:solidFill>
                 <a:latin typeface="Amiri" pitchFamily="2" charset="-78"/>
+                <a:ea typeface="Amiri" pitchFamily="2" charset="-78"/>
                 <a:cs typeface="Amiri" pitchFamily="2" charset="-78"/>
               </a:rPr>
               <a:t>مِنَ العَادِيِّ</a:t>
@@ -39422,6 +39680,7 @@
                   <a:srgbClr val="1B3B6F"/>
                 </a:solidFill>
                 <a:latin typeface="Amiri" pitchFamily="2" charset="-78"/>
+                <a:ea typeface="Amiri" pitchFamily="2" charset="-78"/>
                 <a:cs typeface="Amiri" pitchFamily="2" charset="-78"/>
               </a:rPr>
               <a:t>مِنَ الأَدَبِ أَنْ</a:t>
@@ -39687,6 +39946,7 @@
                   <a:srgbClr val="1B3B6F"/>
                 </a:solidFill>
                 <a:latin typeface="Amiri" pitchFamily="2" charset="-78"/>
+                <a:ea typeface="Amiri" pitchFamily="2" charset="-78"/>
                 <a:cs typeface="Amiri" pitchFamily="2" charset="-78"/>
               </a:rPr>
               <a:t>بِعَكْسِ</a:t>
@@ -39844,6 +40104,7 @@
                   <a:srgbClr val="1B3B6F"/>
                 </a:solidFill>
                 <a:latin typeface="Amiri" pitchFamily="2" charset="-78"/>
+                <a:ea typeface="Amiri" pitchFamily="2" charset="-78"/>
                 <a:cs typeface="Amiri" pitchFamily="2" charset="-78"/>
               </a:rPr>
               <a:t>بَيْنَمَا</a:t>
@@ -39947,6 +40208,7 @@
                   <a:srgbClr val="1B3B6F"/>
                 </a:solidFill>
                 <a:latin typeface="Amiri" pitchFamily="2" charset="-78"/>
+                <a:ea typeface="Amiri" pitchFamily="2" charset="-78"/>
                 <a:cs typeface="Amiri" pitchFamily="2" charset="-78"/>
               </a:rPr>
               <a:t>مِثْلُ</a:t>
@@ -40080,6 +40342,7 @@
                   <a:srgbClr val="D4AF37"/>
                 </a:solidFill>
                 <a:latin typeface="Amiri" pitchFamily="2" charset="-78"/>
+                <a:ea typeface="Amiri" pitchFamily="2" charset="-78"/>
                 <a:cs typeface="Amiri" pitchFamily="2" charset="-78"/>
               </a:rPr>
               <a:t>م</a:t>
@@ -40400,6 +40663,7 @@
                   <a:srgbClr val="8A6D1E"/>
                 </a:solidFill>
                 <a:latin typeface="Amiri" pitchFamily="2" charset="-78"/>
+                <a:ea typeface="Amiri" pitchFamily="2" charset="-78"/>
                 <a:cs typeface="Amiri" pitchFamily="2" charset="-78"/>
               </a:rPr>
               <a:t>فِي الغُرَفِ</a:t>
@@ -41576,6 +41840,7 @@
                   <a:srgbClr val="1B3B6F"/>
                 </a:solidFill>
                 <a:latin typeface="Amiri" pitchFamily="2" charset="-78"/>
+                <a:ea typeface="Amiri" pitchFamily="2" charset="-78"/>
                 <a:cs typeface="Amiri" pitchFamily="2" charset="-78"/>
               </a:rPr>
               <a:t>دَوْرُكَ!</a:t>
@@ -41652,6 +41917,7 @@
                   <a:srgbClr val="1B3B6F"/>
                 </a:solidFill>
                 <a:latin typeface="Amiri" pitchFamily="2" charset="-78"/>
+                <a:ea typeface="Amiri" pitchFamily="2" charset="-78"/>
                 <a:cs typeface="Amiri" pitchFamily="2" charset="-78"/>
               </a:rPr>
               <a:t>أَحْسَنْتَ! / أَحْسَنْتِ!</a:t>
@@ -41728,6 +41994,7 @@
                   <a:srgbClr val="1B3B6F"/>
                 </a:solidFill>
                 <a:latin typeface="Amiri" pitchFamily="2" charset="-78"/>
+                <a:ea typeface="Amiri" pitchFamily="2" charset="-78"/>
                 <a:cs typeface="Amiri" pitchFamily="2" charset="-78"/>
               </a:rPr>
               <a:t>تَكَلَّمْ أَكْثَرَ، مِنْ فَضْلِكَ</a:t>
@@ -41804,6 +42071,7 @@
                   <a:srgbClr val="1B3B6F"/>
                 </a:solidFill>
                 <a:latin typeface="Amiri" pitchFamily="2" charset="-78"/>
+                <a:ea typeface="Amiri" pitchFamily="2" charset="-78"/>
                 <a:cs typeface="Amiri" pitchFamily="2" charset="-78"/>
               </a:rPr>
               <a:t>لِمَاذَا؟</a:t>
@@ -41975,6 +42243,7 @@
                   <a:srgbClr val="D4AF37"/>
                 </a:solidFill>
                 <a:latin typeface="Amiri" pitchFamily="2" charset="-78"/>
+                <a:ea typeface="Amiri" pitchFamily="2" charset="-78"/>
                 <a:cs typeface="Amiri" pitchFamily="2" charset="-78"/>
               </a:rPr>
               <a:t>م</a:t>
@@ -42295,6 +42564,7 @@
                   <a:srgbClr val="8A6D1E"/>
                 </a:solidFill>
                 <a:latin typeface="Amiri" pitchFamily="2" charset="-78"/>
+                <a:ea typeface="Amiri" pitchFamily="2" charset="-78"/>
                 <a:cs typeface="Amiri" pitchFamily="2" charset="-78"/>
               </a:rPr>
               <a:t>ضَيْفٌ عَلَى العَشَاءِ</a:t>
@@ -42575,6 +42845,7 @@
                   <a:srgbClr val="1B3B6F"/>
                 </a:solidFill>
                 <a:latin typeface="Amiri" pitchFamily="2" charset="-78"/>
+                <a:ea typeface="Amiri" pitchFamily="2" charset="-78"/>
                 <a:cs typeface="Amiri" pitchFamily="2" charset="-78"/>
               </a:rPr>
               <a:t>شُكْرًا … ، بَيْتُكُمْ …</a:t>
@@ -42651,6 +42922,7 @@
                   <a:srgbClr val="1B3B6F"/>
                 </a:solidFill>
                 <a:latin typeface="Amiri" pitchFamily="2" charset="-78"/>
+                <a:ea typeface="Amiri" pitchFamily="2" charset="-78"/>
                 <a:cs typeface="Amiri" pitchFamily="2" charset="-78"/>
               </a:rPr>
               <a:t>أَهْلًا وَسَهْلًا! تَفَضَّلْ.</a:t>
@@ -42819,6 +43091,7 @@
                   <a:srgbClr val="1B3B6F"/>
                 </a:solidFill>
                 <a:latin typeface="Amiri" pitchFamily="2" charset="-78"/>
+                <a:ea typeface="Amiri" pitchFamily="2" charset="-78"/>
                 <a:cs typeface="Amiri" pitchFamily="2" charset="-78"/>
               </a:rPr>
               <a:t>هَلْ أَخْلَعُ …؟</a:t>
@@ -42895,6 +43168,7 @@
                   <a:srgbClr val="1B3B6F"/>
                 </a:solidFill>
                 <a:latin typeface="Amiri" pitchFamily="2" charset="-78"/>
+                <a:ea typeface="Amiri" pitchFamily="2" charset="-78"/>
                 <a:cs typeface="Amiri" pitchFamily="2" charset="-78"/>
               </a:rPr>
               <a:t>تَفَضَّلْ، اجْلِسْ هُنَا.</a:t>
@@ -43063,6 +43337,7 @@
                   <a:srgbClr val="1B3B6F"/>
                 </a:solidFill>
                 <a:latin typeface="Amiri" pitchFamily="2" charset="-78"/>
+                <a:ea typeface="Amiri" pitchFamily="2" charset="-78"/>
                 <a:cs typeface="Amiri" pitchFamily="2" charset="-78"/>
               </a:rPr>
               <a:t>الطَّعَامُ … جِدًّا!</a:t>
@@ -43139,6 +43414,7 @@
                   <a:srgbClr val="1B3B6F"/>
                 </a:solidFill>
                 <a:latin typeface="Amiri" pitchFamily="2" charset="-78"/>
+                <a:ea typeface="Amiri" pitchFamily="2" charset="-78"/>
                 <a:cs typeface="Amiri" pitchFamily="2" charset="-78"/>
               </a:rPr>
               <a:t>نَعَمْ، مِنْ فَضْلِكَ. هٰذَا هُوَ المَنْسَفُ.</a:t>
@@ -43307,6 +43583,7 @@
                   <a:srgbClr val="1B3B6F"/>
                 </a:solidFill>
                 <a:latin typeface="Amiri" pitchFamily="2" charset="-78"/>
+                <a:ea typeface="Amiri" pitchFamily="2" charset="-78"/>
                 <a:cs typeface="Amiri" pitchFamily="2" charset="-78"/>
               </a:rPr>
               <a:t>قَلِيلًا فَقَطْ، …</a:t>
@@ -43383,6 +43660,7 @@
                   <a:srgbClr val="1B3B6F"/>
                 </a:solidFill>
                 <a:latin typeface="Amiri" pitchFamily="2" charset="-78"/>
+                <a:ea typeface="Amiri" pitchFamily="2" charset="-78"/>
                 <a:cs typeface="Amiri" pitchFamily="2" charset="-78"/>
               </a:rPr>
               <a:t>دَامَتْ أَيَّامُكَ. خُذْ أَكْثَرَ!</a:t>
@@ -43551,6 +43829,7 @@
                   <a:srgbClr val="1B3B6F"/>
                 </a:solidFill>
                 <a:latin typeface="Amiri" pitchFamily="2" charset="-78"/>
+                <a:ea typeface="Amiri" pitchFamily="2" charset="-78"/>
                 <a:cs typeface="Amiri" pitchFamily="2" charset="-78"/>
               </a:rPr>
               <a:t>نَعَمْ، نَأْكُلُ … فِي …</a:t>
@@ -43627,6 +43906,7 @@
                   <a:srgbClr val="1B3B6F"/>
                 </a:solidFill>
                 <a:latin typeface="Amiri" pitchFamily="2" charset="-78"/>
+                <a:ea typeface="Amiri" pitchFamily="2" charset="-78"/>
                 <a:cs typeface="Amiri" pitchFamily="2" charset="-78"/>
               </a:rPr>
               <a:t>هَلْ تَأْكُلُونَ مَعًا فِي بَيْتِكُمْ أَيْضًا؟</a:t>
@@ -43901,6 +44181,7 @@
                   <a:srgbClr val="D4AF37"/>
                 </a:solidFill>
                 <a:latin typeface="Amiri" pitchFamily="2" charset="-78"/>
+                <a:ea typeface="Amiri" pitchFamily="2" charset="-78"/>
                 <a:cs typeface="Amiri" pitchFamily="2" charset="-78"/>
               </a:rPr>
               <a:t>م</a:t>
@@ -44221,6 +44502,7 @@
                   <a:srgbClr val="8A6D1E"/>
                 </a:solidFill>
                 <a:latin typeface="Amiri" pitchFamily="2" charset="-78"/>
+                <a:ea typeface="Amiri" pitchFamily="2" charset="-78"/>
                 <a:cs typeface="Amiri" pitchFamily="2" charset="-78"/>
               </a:rPr>
               <a:t>نَصَائِحُ لِطَالِبٍ زَائِرٍ</a:t>
@@ -44501,6 +44783,7 @@
                   <a:srgbClr val="1B3B6F"/>
                 </a:solidFill>
                 <a:latin typeface="Amiri" pitchFamily="2" charset="-78"/>
+                <a:ea typeface="Amiri" pitchFamily="2" charset="-78"/>
                 <a:cs typeface="Amiri" pitchFamily="2" charset="-78"/>
               </a:rPr>
               <a:t>اِذْهَبْ … / لَا …</a:t>
@@ -44577,6 +44860,7 @@
                   <a:srgbClr val="1B3B6F"/>
                 </a:solidFill>
                 <a:latin typeface="Amiri" pitchFamily="2" charset="-78"/>
+                <a:ea typeface="Amiri" pitchFamily="2" charset="-78"/>
                 <a:cs typeface="Amiri" pitchFamily="2" charset="-78"/>
               </a:rPr>
               <a:t>سَأَزُورُ عَائِلَةَ صَدِيقِي الإِنْجْلِيزِيِّ. بِمَاذَا تَنْصَحُنِي؟</a:t>
@@ -44745,6 +45029,7 @@
                   <a:srgbClr val="1B3B6F"/>
                 </a:solidFill>
                 <a:latin typeface="Amiri" pitchFamily="2" charset="-78"/>
+                <a:ea typeface="Amiri" pitchFamily="2" charset="-78"/>
                 <a:cs typeface="Amiri" pitchFamily="2" charset="-78"/>
               </a:rPr>
               <a:t>نَعَمْ، اِحْمِلْ …</a:t>
@@ -44821,6 +45106,7 @@
                   <a:srgbClr val="1B3B6F"/>
                 </a:solidFill>
                 <a:latin typeface="Amiri" pitchFamily="2" charset="-78"/>
+                <a:ea typeface="Amiri" pitchFamily="2" charset="-78"/>
                 <a:cs typeface="Amiri" pitchFamily="2" charset="-78"/>
               </a:rPr>
               <a:t>هَلْ أَحْمِلُ هَدِيَّةً؟</a:t>
@@ -44989,6 +45275,7 @@
                   <a:srgbClr val="1B3B6F"/>
                 </a:solidFill>
                 <a:latin typeface="Amiri" pitchFamily="2" charset="-78"/>
+                <a:ea typeface="Amiri" pitchFamily="2" charset="-78"/>
                 <a:cs typeface="Amiri" pitchFamily="2" charset="-78"/>
               </a:rPr>
               <a:t>يَنْبَغِي أَنْ … وَلَا …</a:t>
@@ -45065,6 +45352,7 @@
                   <a:srgbClr val="1B3B6F"/>
                 </a:solidFill>
                 <a:latin typeface="Amiri" pitchFamily="2" charset="-78"/>
+                <a:ea typeface="Amiri" pitchFamily="2" charset="-78"/>
                 <a:cs typeface="Amiri" pitchFamily="2" charset="-78"/>
               </a:rPr>
               <a:t>وَعَلَى المَائِدَةِ؟</a:t>
@@ -45168,6 +45456,7 @@
                   <a:srgbClr val="1B3B6F"/>
                 </a:solidFill>
                 <a:latin typeface="Amiri" pitchFamily="2" charset="-78"/>
+                <a:ea typeface="Amiri" pitchFamily="2" charset="-78"/>
                 <a:cs typeface="Amiri" pitchFamily="2" charset="-78"/>
               </a:rPr>
               <a:t>هَلِ الضِّيَافَةُ فِي عُمَانَ … أَكْثَرُ … مِنْ …؟</a:t>
@@ -45244,6 +45533,7 @@
                   <a:srgbClr val="1B3B6F"/>
                 </a:solidFill>
                 <a:latin typeface="Amiri" pitchFamily="2" charset="-78"/>
+                <a:ea typeface="Amiri" pitchFamily="2" charset="-78"/>
                 <a:cs typeface="Amiri" pitchFamily="2" charset="-78"/>
               </a:rPr>
               <a:t>فِي عُمَانَ نَأْكُلُ بِأَيْدِينَا أَحْيَانًا.</a:t>
@@ -45347,6 +45637,7 @@
                   <a:srgbClr val="1B3B6F"/>
                 </a:solidFill>
                 <a:latin typeface="Amiri" pitchFamily="2" charset="-78"/>
+                <a:ea typeface="Amiri" pitchFamily="2" charset="-78"/>
                 <a:cs typeface="Amiri" pitchFamily="2" charset="-78"/>
               </a:rPr>
               <a:t>أُحِبُّ … لِأَنَّ …</a:t>
@@ -45426,6 +45717,7 @@
                   <a:srgbClr val="1B3B6F"/>
                 </a:solidFill>
                 <a:latin typeface="Amiri" pitchFamily="2" charset="-78"/>
+                <a:ea typeface="Amiri" pitchFamily="2" charset="-78"/>
                 <a:cs typeface="Amiri" pitchFamily="2" charset="-78"/>
               </a:rPr>
               <a:t>نَعَمْ، نُقَدِّمُ القَهْوَةَ وَالتَّمْرَ لِكُلِّ ضَيْفٍ. وَمَا العَادَةُ الَّتِي تُحِبُّهَا هُنَا؟</a:t>
@@ -45600,13 +45892,9 @@
     <a:fontScheme name="Office">
       <a:majorFont>
         <a:latin typeface="Calibri Light" panose="020F0302020204030204"/>
-        <a:ea typeface=""/>
-        <a:cs typeface=""/>
-        <a:font script="Jpan" typeface="游ゴシック Light"/>
-        <a:font script="Hang" typeface="맑은 고딕"/>
-        <a:font script="Hans" typeface="等线 Light"/>
-        <a:font script="Hant" typeface="新細明體"/>
-        <a:font script="Arab" typeface="Times New Roman"/>
+        <a:ea typeface="Amiri" pitchFamily="2" charset="-78"/>
+        <a:cs typeface="Amiri" pitchFamily="2" charset="-78"/>
+        <a:font script="Arab" typeface="Amiri"/>
         <a:font script="Hebr" typeface="Times New Roman"/>
         <a:font script="Thai" typeface="Angsana New"/>
         <a:font script="Ethi" typeface="Nyala"/>
@@ -45652,13 +45940,9 @@
       </a:majorFont>
       <a:minorFont>
         <a:latin typeface="Calibri" panose="020F0502020204030204"/>
-        <a:ea typeface=""/>
-        <a:cs typeface=""/>
-        <a:font script="Jpan" typeface="游ゴシック"/>
-        <a:font script="Hang" typeface="맑은 고딕"/>
-        <a:font script="Hans" typeface="等线"/>
-        <a:font script="Hant" typeface="新細明體"/>
-        <a:font script="Arab" typeface="Arial"/>
+        <a:ea typeface="Amiri" pitchFamily="2" charset="-78"/>
+        <a:cs typeface="Amiri" pitchFamily="2" charset="-78"/>
+        <a:font script="Arab" typeface="Amiri"/>
         <a:font script="Hebr" typeface="Arial"/>
         <a:font script="Thai" typeface="Cordia New"/>
         <a:font script="Ethi" typeface="Nyala"/>
